--- a/06_render/out/deck_niacinamide.pptx
+++ b/06_render/out/deck_niacinamide.pptx
@@ -5418,7 +5418,7 @@
                 </a:solidFill>
                 <a:latin typeface="Arimo"/>
               </a:rPr>
-              <a:t>Источники: fact_0038, SRC-A035</a:t>
+              <a:t>Источники: fact_0038</a:t>
             </a:r>
           </a:p>
         </p:txBody>
@@ -5463,7 +5463,7 @@
                 </a:solidFill>
                 <a:latin typeface="Arimo"/>
               </a:rPr>
-              <a:t>Безопасность и Переносимость</a:t>
+              <a:t>Клиническая Переносимость</a:t>
             </a:r>
           </a:p>
         </p:txBody>
@@ -5508,7 +5508,7 @@
                 </a:solidFill>
                 <a:latin typeface="Arimo"/>
               </a:rPr>
-              <a:t>Мягкий терапевтический профиль и терапия чувствительной кожи</a:t>
+              <a:t>Мягкий терапевтический профиль и применение при чувствительности кожи</a:t>
             </a:r>
           </a:p>
         </p:txBody>
@@ -5643,7 +5643,7 @@
                 </a:solidFill>
                 <a:latin typeface="Arimo"/>
               </a:rPr>
-              <a:t>Безопасность применения при беременности и лактации</a:t>
+              <a:t>Применение при повышенной чувствительности кожи</a:t>
             </a:r>
           </a:p>
         </p:txBody>
@@ -5688,7 +5688,7 @@
                 </a:solidFill>
                 <a:latin typeface="Arimo"/>
               </a:rPr>
-              <a:t>Ниацинамид обладает превосходной переносимостью, разрешен к применению при розацеа, а также абсолютно безопасен в периоды беременности и лактации.</a:t>
+              <a:t>Ниацинамид демонстрирует высокую клиническую переносимость. Улучшает барьерную функцию рогового слоя и обеспечивает терапевтический эффект у пациентов с розацеа.</a:t>
             </a:r>
           </a:p>
         </p:txBody>
@@ -6054,7 +6054,7 @@
                 </a:solidFill>
                 <a:latin typeface="Arimo"/>
               </a:rPr>
-              <a:t>• Обладает исключительной безопасностью при беременности и терапевтической мягкостью при розацеа.</a:t>
+              <a:t>• Демонстрирует высокую клиническую переносимость и терапевтическую мягкость при розацеа.</a:t>
             </a:r>
           </a:p>
         </p:txBody>

--- a/06_render/out/deck_niacinamide.pptx
+++ b/06_render/out/deck_niacinamide.pptx
@@ -3221,7 +3221,7 @@
               </a:lnSpc>
               <a:defRPr sz="3600" b="1" i="0">
                 <a:solidFill>
-                  <a:srgbClr val="2C3440"/>
+                  <a:srgbClr val="1D291C"/>
                 </a:solidFill>
                 <a:latin typeface="Arimo"/>
               </a:defRPr>
@@ -3229,7 +3229,7 @@
             <a:r>
               <a:rPr sz="3600" b="1" i="0">
                 <a:solidFill>
-                  <a:srgbClr val="2C3440"/>
+                  <a:srgbClr val="1D291C"/>
                 </a:solidFill>
                 <a:latin typeface="Arimo"/>
               </a:rPr>
@@ -3339,7 +3339,7 @@
                 </a:solidFill>
                 <a:latin typeface="Arimo"/>
               </a:rPr>
-              <a:t>Применение Ниацинамида в дерматологии</a:t>
+              <a:t>[Placeholder] Применение Ниацинамида в дерматологии</a:t>
             </a:r>
           </a:p>
         </p:txBody>
@@ -3488,7 +3488,7 @@
               </a:lnSpc>
               <a:defRPr sz="3600" b="1" i="0">
                 <a:solidFill>
-                  <a:srgbClr val="2C3440"/>
+                  <a:srgbClr val="1D291C"/>
                 </a:solidFill>
                 <a:latin typeface="Arimo"/>
               </a:defRPr>
@@ -3496,7 +3496,7 @@
             <a:r>
               <a:rPr sz="3600" b="1" i="0">
                 <a:solidFill>
-                  <a:srgbClr val="2C3440"/>
+                  <a:srgbClr val="1D291C"/>
                 </a:solidFill>
                 <a:latin typeface="Arimo"/>
               </a:rPr>
@@ -3694,7 +3694,7 @@
               </a:lnSpc>
               <a:defRPr sz="2600" b="1" i="0">
                 <a:solidFill>
-                  <a:srgbClr val="2C3440"/>
+                  <a:srgbClr val="1D291C"/>
                 </a:solidFill>
                 <a:latin typeface="Arimo"/>
               </a:defRPr>
@@ -3702,7 +3702,7 @@
             <a:r>
               <a:rPr sz="2600" b="1" i="0">
                 <a:solidFill>
-                  <a:srgbClr val="2C3440"/>
+                  <a:srgbClr val="1D291C"/>
                 </a:solidFill>
                 <a:latin typeface="Arimo"/>
               </a:rPr>
@@ -3871,67 +3871,30 @@
           </a:p>
         </p:txBody>
       </p:sp>
-      <p:sp>
-        <p:nvSpPr>
-          <p:cNvPr id="7" name="Rounded Rectangle 6"/>
-          <p:cNvSpPr/>
+      <p:pic>
+        <p:nvPicPr>
+          <p:cNvPr id="7" name="Picture 6" descr="niacinamide.png"/>
+          <p:cNvPicPr>
+            <a:picLocks noChangeAspect="1"/>
+          </p:cNvPicPr>
           <p:nvPr/>
-        </p:nvSpPr>
+        </p:nvPicPr>
+        <p:blipFill>
+          <a:blip r:embed="rId2"/>
+          <a:stretch>
+            <a:fillRect/>
+          </a:stretch>
+        </p:blipFill>
         <p:spPr>
           <a:xfrm>
             <a:off x="5179218" y="1339453"/>
             <a:ext cx="3607593" cy="2857500"/>
           </a:xfrm>
-          <a:prstGeom prst="roundRect">
+          <a:prstGeom prst="rect">
             <a:avLst/>
           </a:prstGeom>
-          <a:solidFill>
-            <a:srgbClr val="D7E0CE"/>
-          </a:solidFill>
-          <a:ln w="12700">
-            <a:solidFill>
-              <a:srgbClr val="D7E0CE"/>
-            </a:solidFill>
-          </a:ln>
-        </p:spPr>
-        <p:style>
-          <a:lnRef idx="1">
-            <a:schemeClr val="accent1"/>
-          </a:lnRef>
-          <a:fillRef idx="3">
-            <a:schemeClr val="accent1"/>
-          </a:fillRef>
-          <a:effectRef idx="2">
-            <a:schemeClr val="accent1"/>
-          </a:effectRef>
-          <a:fontRef idx="minor">
-            <a:schemeClr val="lt1"/>
-          </a:fontRef>
-        </p:style>
-        <p:txBody>
-          <a:bodyPr rtlCol="0" anchor="ctr" wrap="square"/>
-          <a:lstStyle/>
-          <a:p>
-            <a:pPr algn="ctr">
-              <a:defRPr sz="1300" b="1">
-                <a:solidFill>
-                  <a:srgbClr val="6D8470"/>
-                </a:solidFill>
-                <a:latin typeface="Arimo"/>
-              </a:defRPr>
-            </a:pPr>
-            <a:r>
-              <a:rPr sz="1300" b="1">
-                <a:solidFill>
-                  <a:srgbClr val="6D8470"/>
-                </a:solidFill>
-                <a:latin typeface="Arimo"/>
-              </a:rPr>
-              <a:t>Церамиды и трансэпидермальный перенос воды</a:t>
-            </a:r>
-          </a:p>
-        </p:txBody>
-      </p:sp>
+        </p:spPr>
+      </p:pic>
     </p:spTree>
   </p:cSld>
   <p:clrMapOvr>
@@ -4076,7 +4039,7 @@
               </a:lnSpc>
               <a:defRPr sz="2600" b="1" i="0">
                 <a:solidFill>
-                  <a:srgbClr val="2C3440"/>
+                  <a:srgbClr val="1D291C"/>
                 </a:solidFill>
                 <a:latin typeface="Arimo"/>
               </a:defRPr>
@@ -4084,7 +4047,7 @@
             <a:r>
               <a:rPr sz="2600" b="1" i="0">
                 <a:solidFill>
-                  <a:srgbClr val="2C3440"/>
+                  <a:srgbClr val="1D291C"/>
                 </a:solidFill>
                 <a:latin typeface="Arimo"/>
               </a:rPr>
@@ -4309,7 +4272,7 @@
                 </a:solidFill>
                 <a:latin typeface="Arimo"/>
               </a:rPr>
-              <a:t>Динамика снижения воспалительных элементов</a:t>
+              <a:t>[Placeholder] Динамика снижения воспалительных элементов</a:t>
             </a:r>
           </a:p>
         </p:txBody>
@@ -4458,7 +4421,7 @@
               </a:lnSpc>
               <a:defRPr sz="2600" b="1" i="0">
                 <a:solidFill>
-                  <a:srgbClr val="2C3440"/>
+                  <a:srgbClr val="1D291C"/>
                 </a:solidFill>
                 <a:latin typeface="Arimo"/>
               </a:defRPr>
@@ -4466,7 +4429,7 @@
             <a:r>
               <a:rPr sz="2600" b="1" i="0">
                 <a:solidFill>
-                  <a:srgbClr val="2C3440"/>
+                  <a:srgbClr val="1D291C"/>
                 </a:solidFill>
                 <a:latin typeface="Arimo"/>
               </a:rPr>
@@ -4593,7 +4556,7 @@
               </a:lnSpc>
               <a:defRPr sz="1800" b="1" i="0">
                 <a:solidFill>
-                  <a:srgbClr val="2C3440"/>
+                  <a:srgbClr val="1D291C"/>
                 </a:solidFill>
                 <a:latin typeface="Arimo"/>
               </a:defRPr>
@@ -4601,7 +4564,7 @@
             <a:r>
               <a:rPr sz="1800" b="1" i="0">
                 <a:solidFill>
-                  <a:srgbClr val="2C3440"/>
+                  <a:srgbClr val="1D291C"/>
                 </a:solidFill>
                 <a:latin typeface="Arimo"/>
               </a:rPr>
@@ -4728,7 +4691,7 @@
               </a:lnSpc>
               <a:defRPr sz="1800" b="1" i="0">
                 <a:solidFill>
-                  <a:srgbClr val="2C3440"/>
+                  <a:srgbClr val="1D291C"/>
                 </a:solidFill>
                 <a:latin typeface="Arimo"/>
               </a:defRPr>
@@ -4736,7 +4699,7 @@
             <a:r>
               <a:rPr sz="1800" b="1" i="0">
                 <a:solidFill>
-                  <a:srgbClr val="2C3440"/>
+                  <a:srgbClr val="1D291C"/>
                 </a:solidFill>
                 <a:latin typeface="Arimo"/>
               </a:rPr>
@@ -4863,7 +4826,7 @@
               </a:lnSpc>
               <a:defRPr sz="1800" b="1" i="0">
                 <a:solidFill>
-                  <a:srgbClr val="2C3440"/>
+                  <a:srgbClr val="1D291C"/>
                 </a:solidFill>
                 <a:latin typeface="Arimo"/>
               </a:defRPr>
@@ -4871,7 +4834,7 @@
             <a:r>
               <a:rPr sz="1800" b="1" i="0">
                 <a:solidFill>
-                  <a:srgbClr val="2C3440"/>
+                  <a:srgbClr val="1D291C"/>
                 </a:solidFill>
                 <a:latin typeface="Arimo"/>
               </a:rPr>
@@ -5069,7 +5032,7 @@
               </a:lnSpc>
               <a:defRPr sz="2600" b="1" i="0">
                 <a:solidFill>
-                  <a:srgbClr val="2C3440"/>
+                  <a:srgbClr val="1D291C"/>
                 </a:solidFill>
                 <a:latin typeface="Arimo"/>
               </a:defRPr>
@@ -5077,7 +5040,7 @@
             <a:r>
               <a:rPr sz="2600" b="1" i="0">
                 <a:solidFill>
-                  <a:srgbClr val="2C3440"/>
+                  <a:srgbClr val="1D291C"/>
                 </a:solidFill>
                 <a:latin typeface="Arimo"/>
               </a:rPr>
@@ -5302,7 +5265,7 @@
                 </a:solidFill>
                 <a:latin typeface="Arimo"/>
               </a:rPr>
-              <a:t>Гистологическая картина омоложения кожи</a:t>
+              <a:t>[Placeholder] Гистологическая картина омоложения кожи</a:t>
             </a:r>
           </a:p>
         </p:txBody>
@@ -5451,7 +5414,7 @@
               </a:lnSpc>
               <a:defRPr sz="2600" b="1" i="0">
                 <a:solidFill>
-                  <a:srgbClr val="2C3440"/>
+                  <a:srgbClr val="1D291C"/>
                 </a:solidFill>
                 <a:latin typeface="Arimo"/>
               </a:defRPr>
@@ -5459,7 +5422,7 @@
             <a:r>
               <a:rPr sz="2600" b="1" i="0">
                 <a:solidFill>
-                  <a:srgbClr val="2C3440"/>
+                  <a:srgbClr val="1D291C"/>
                 </a:solidFill>
                 <a:latin typeface="Arimo"/>
               </a:rPr>
@@ -5837,7 +5800,7 @@
               </a:lnSpc>
               <a:defRPr sz="2600" b="1" i="0">
                 <a:solidFill>
-                  <a:srgbClr val="2C3440"/>
+                  <a:srgbClr val="1D291C"/>
                 </a:solidFill>
                 <a:latin typeface="Arimo"/>
               </a:defRPr>
@@ -5845,7 +5808,7 @@
             <a:r>
               <a:rPr sz="2600" b="1" i="0">
                 <a:solidFill>
-                  <a:srgbClr val="2C3440"/>
+                  <a:srgbClr val="1D291C"/>
                 </a:solidFill>
                 <a:latin typeface="Arimo"/>
               </a:rPr>

--- a/06_render/out/deck_niacinamide.pptx
+++ b/06_render/out/deck_niacinamide.pptx
@@ -3221,7 +3221,7 @@
               </a:lnSpc>
               <a:defRPr sz="3600" b="1" i="0">
                 <a:solidFill>
-                  <a:srgbClr val="1D291C"/>
+                  <a:srgbClr val="2C3440"/>
                 </a:solidFill>
                 <a:latin typeface="Arimo"/>
               </a:defRPr>
@@ -3229,7 +3229,7 @@
             <a:r>
               <a:rPr sz="3600" b="1" i="0">
                 <a:solidFill>
-                  <a:srgbClr val="1D291C"/>
+                  <a:srgbClr val="2C3440"/>
                 </a:solidFill>
                 <a:latin typeface="Arimo"/>
               </a:rPr>
@@ -3488,7 +3488,7 @@
               </a:lnSpc>
               <a:defRPr sz="3600" b="1" i="0">
                 <a:solidFill>
-                  <a:srgbClr val="1D291C"/>
+                  <a:srgbClr val="2C3440"/>
                 </a:solidFill>
                 <a:latin typeface="Arimo"/>
               </a:defRPr>
@@ -3496,7 +3496,7 @@
             <a:r>
               <a:rPr sz="3600" b="1" i="0">
                 <a:solidFill>
-                  <a:srgbClr val="1D291C"/>
+                  <a:srgbClr val="2C3440"/>
                 </a:solidFill>
                 <a:latin typeface="Arimo"/>
               </a:rPr>
@@ -3616,7 +3616,7 @@
                 </a:solidFill>
                 <a:latin typeface="Arimo"/>
               </a:rPr>
-              <a:t>ТОЛЬКО ДЛЯ ПРАКТИКУЮЩИХ СПЕЦИАЛИСТОВ</a:t>
+              <a:t>ТОЛЬКО ДЛЯ ПРАКТИКУЮЩИХ СПЕЦИАЛИСТОВ | SERVIER MEDICAL ART BY LES LABORATOIRES SERVIER (CC-BY 4.0)</a:t>
             </a:r>
           </a:p>
         </p:txBody>
@@ -3694,7 +3694,7 @@
               </a:lnSpc>
               <a:defRPr sz="2600" b="1" i="0">
                 <a:solidFill>
-                  <a:srgbClr val="1D291C"/>
+                  <a:srgbClr val="2C3440"/>
                 </a:solidFill>
                 <a:latin typeface="Arimo"/>
               </a:defRPr>
@@ -3702,7 +3702,7 @@
             <a:r>
               <a:rPr sz="2600" b="1" i="0">
                 <a:solidFill>
-                  <a:srgbClr val="1D291C"/>
+                  <a:srgbClr val="2C3440"/>
                 </a:solidFill>
                 <a:latin typeface="Arimo"/>
               </a:rPr>
@@ -3873,7 +3873,7 @@
       </p:sp>
       <p:pic>
         <p:nvPicPr>
-          <p:cNvPr id="7" name="Picture 6" descr="niacinamide.png"/>
+          <p:cNvPr id="7" name="Picture 6" descr="ceramide_synthesis.png"/>
           <p:cNvPicPr>
             <a:picLocks noChangeAspect="1"/>
           </p:cNvPicPr>
@@ -4039,7 +4039,7 @@
               </a:lnSpc>
               <a:defRPr sz="2600" b="1" i="0">
                 <a:solidFill>
-                  <a:srgbClr val="1D291C"/>
+                  <a:srgbClr val="2C3440"/>
                 </a:solidFill>
                 <a:latin typeface="Arimo"/>
               </a:defRPr>
@@ -4047,7 +4047,7 @@
             <a:r>
               <a:rPr sz="2600" b="1" i="0">
                 <a:solidFill>
-                  <a:srgbClr val="1D291C"/>
+                  <a:srgbClr val="2C3440"/>
                 </a:solidFill>
                 <a:latin typeface="Arimo"/>
               </a:rPr>
@@ -4216,67 +4216,30 @@
           </a:p>
         </p:txBody>
       </p:sp>
-      <p:sp>
-        <p:nvSpPr>
-          <p:cNvPr id="7" name="Rounded Rectangle 6"/>
-          <p:cNvSpPr/>
+      <p:pic>
+        <p:nvPicPr>
+          <p:cNvPr id="7" name="Picture 6" descr="niacinamide.png"/>
+          <p:cNvPicPr>
+            <a:picLocks noChangeAspect="1"/>
+          </p:cNvPicPr>
           <p:nvPr/>
-        </p:nvSpPr>
+        </p:nvPicPr>
+        <p:blipFill>
+          <a:blip r:embed="rId2"/>
+          <a:stretch>
+            <a:fillRect/>
+          </a:stretch>
+        </p:blipFill>
         <p:spPr>
           <a:xfrm>
             <a:off x="5179218" y="1339453"/>
             <a:ext cx="3607593" cy="2857500"/>
           </a:xfrm>
-          <a:prstGeom prst="roundRect">
+          <a:prstGeom prst="rect">
             <a:avLst/>
           </a:prstGeom>
-          <a:solidFill>
-            <a:srgbClr val="D7E0CE"/>
-          </a:solidFill>
-          <a:ln w="12700">
-            <a:solidFill>
-              <a:srgbClr val="D7E0CE"/>
-            </a:solidFill>
-          </a:ln>
-        </p:spPr>
-        <p:style>
-          <a:lnRef idx="1">
-            <a:schemeClr val="accent1"/>
-          </a:lnRef>
-          <a:fillRef idx="3">
-            <a:schemeClr val="accent1"/>
-          </a:fillRef>
-          <a:effectRef idx="2">
-            <a:schemeClr val="accent1"/>
-          </a:effectRef>
-          <a:fontRef idx="minor">
-            <a:schemeClr val="lt1"/>
-          </a:fontRef>
-        </p:style>
-        <p:txBody>
-          <a:bodyPr rtlCol="0" anchor="ctr" wrap="square"/>
-          <a:lstStyle/>
-          <a:p>
-            <a:pPr algn="ctr">
-              <a:defRPr sz="1300" b="1">
-                <a:solidFill>
-                  <a:srgbClr val="6D8470"/>
-                </a:solidFill>
-                <a:latin typeface="Arimo"/>
-              </a:defRPr>
-            </a:pPr>
-            <a:r>
-              <a:rPr sz="1300" b="1">
-                <a:solidFill>
-                  <a:srgbClr val="6D8470"/>
-                </a:solidFill>
-                <a:latin typeface="Arimo"/>
-              </a:rPr>
-              <a:t>[Placeholder] Динамика снижения воспалительных элементов</a:t>
-            </a:r>
-          </a:p>
-        </p:txBody>
-      </p:sp>
+        </p:spPr>
+      </p:pic>
     </p:spTree>
   </p:cSld>
   <p:clrMapOvr>
@@ -4343,7 +4306,7 @@
                 </a:solidFill>
                 <a:latin typeface="Arimo"/>
               </a:rPr>
-              <a:t>ТОЛЬКО ДЛЯ ПРАКТИКУЮЩИХ СПЕЦИАЛИСТОВ</a:t>
+              <a:t>ТОЛЬКО ДЛЯ ПРАКТИКУЮЩИХ СПЕЦИАЛИСТОВ | SERVIER MEDICAL ART BY LES LABORATOIRES SERVIER (CC-BY 4.0)</a:t>
             </a:r>
           </a:p>
         </p:txBody>
@@ -4421,7 +4384,7 @@
               </a:lnSpc>
               <a:defRPr sz="2600" b="1" i="0">
                 <a:solidFill>
-                  <a:srgbClr val="1D291C"/>
+                  <a:srgbClr val="2C3440"/>
                 </a:solidFill>
                 <a:latin typeface="Arimo"/>
               </a:defRPr>
@@ -4429,7 +4392,7 @@
             <a:r>
               <a:rPr sz="2600" b="1" i="0">
                 <a:solidFill>
-                  <a:srgbClr val="1D291C"/>
+                  <a:srgbClr val="2C3440"/>
                 </a:solidFill>
                 <a:latin typeface="Arimo"/>
               </a:rPr>
@@ -4485,59 +4448,14 @@
       </p:sp>
       <p:sp>
         <p:nvSpPr>
-          <p:cNvPr id="6" name="Rounded Rectangle 5"/>
-          <p:cNvSpPr/>
-          <p:nvPr/>
-        </p:nvSpPr>
-        <p:spPr>
-          <a:xfrm>
-            <a:off x="357187" y="1339453"/>
-            <a:ext cx="2624328" cy="2834640"/>
-          </a:xfrm>
-          <a:prstGeom prst="roundRect">
-            <a:avLst/>
-          </a:prstGeom>
-          <a:solidFill>
-            <a:srgbClr val="E6D2CA"/>
-          </a:solidFill>
-          <a:ln w="12700">
-            <a:solidFill>
-              <a:srgbClr val="D7E0CE"/>
-            </a:solidFill>
-          </a:ln>
-        </p:spPr>
-        <p:style>
-          <a:lnRef idx="1">
-            <a:schemeClr val="accent1"/>
-          </a:lnRef>
-          <a:fillRef idx="3">
-            <a:schemeClr val="accent1"/>
-          </a:fillRef>
-          <a:effectRef idx="2">
-            <a:schemeClr val="accent1"/>
-          </a:effectRef>
-          <a:fontRef idx="minor">
-            <a:schemeClr val="lt1"/>
-          </a:fontRef>
-        </p:style>
-        <p:txBody>
-          <a:bodyPr rtlCol="0" anchor="ctr"/>
-          <a:lstStyle/>
-          <a:p>
-            <a:pPr algn="ctr"/>
-          </a:p>
-        </p:txBody>
-      </p:sp>
-      <p:sp>
-        <p:nvSpPr>
-          <p:cNvPr id="7" name="TextBox 6"/>
+          <p:cNvPr id="6" name="TextBox 5"/>
           <p:cNvSpPr txBox="1"/>
           <p:nvPr/>
         </p:nvSpPr>
         <p:spPr>
           <a:xfrm>
-            <a:off x="540067" y="1518046"/>
-            <a:ext cx="2258568" cy="457200"/>
+            <a:off x="357187" y="1339453"/>
+            <a:ext cx="4572000" cy="2926080"/>
           </a:xfrm>
           <a:prstGeom prst="rect">
             <a:avLst/>
@@ -4554,340 +4472,119 @@
               <a:lnSpc>
                 <a:spcPct val="120000"/>
               </a:lnSpc>
-              <a:defRPr sz="1800" b="1" i="0">
-                <a:solidFill>
-                  <a:srgbClr val="1D291C"/>
+              <a:defRPr sz="1500" b="0" i="0">
+                <a:solidFill>
+                  <a:srgbClr val="3D4A40"/>
                 </a:solidFill>
                 <a:latin typeface="Arimo"/>
               </a:defRPr>
             </a:pPr>
             <a:r>
-              <a:rPr sz="1800" b="1" i="0">
-                <a:solidFill>
-                  <a:srgbClr val="1D291C"/>
+              <a:rPr sz="1500" b="0" i="0">
+                <a:solidFill>
+                  <a:srgbClr val="3D4A40"/>
                 </a:solidFill>
                 <a:latin typeface="Arimo"/>
               </a:rPr>
-              <a:t>Блокада транспорта</a:t>
-            </a:r>
-          </a:p>
-        </p:txBody>
-      </p:sp>
-      <p:sp>
-        <p:nvSpPr>
-          <p:cNvPr id="8" name="TextBox 7"/>
-          <p:cNvSpPr txBox="1"/>
-          <p:nvPr/>
-        </p:nvSpPr>
-        <p:spPr>
-          <a:xfrm>
-            <a:off x="540067" y="2053828"/>
-            <a:ext cx="2258568" cy="1920240"/>
-          </a:xfrm>
-          <a:prstGeom prst="rect">
-            <a:avLst/>
-          </a:prstGeom>
-          <a:noFill/>
-        </p:spPr>
-        <p:txBody>
-          <a:bodyPr wrap="square" tIns="0" bIns="0" lIns="0" rIns="0">
-            <a:spAutoFit/>
-          </a:bodyPr>
-          <a:lstStyle/>
+              <a:t>• Подавляет перенос меланосом из меланоцитов в кератиноциты на клеточном уровне.</a:t>
+            </a:r>
+          </a:p>
           <a:p>
             <a:pPr algn="l">
               <a:lnSpc>
                 <a:spcPct val="120000"/>
               </a:lnSpc>
-              <a:defRPr sz="1300" b="0" i="0">
+              <a:defRPr sz="1500" b="0" i="0">
                 <a:solidFill>
                   <a:srgbClr val="3D4A40"/>
                 </a:solidFill>
                 <a:latin typeface="Arimo"/>
               </a:defRPr>
             </a:pPr>
-            <a:r>
-              <a:rPr sz="1300" b="0" i="0">
-                <a:solidFill>
-                  <a:srgbClr val="3D4A40"/>
-                </a:solidFill>
-                <a:latin typeface="Arimo"/>
-              </a:rPr>
-              <a:t>Подавляет перенос меланосом из меланоцитов в кератиноциты на клеточном уровне.</a:t>
-            </a:r>
-          </a:p>
-        </p:txBody>
-      </p:sp>
-      <p:sp>
-        <p:nvSpPr>
-          <p:cNvPr id="9" name="Rounded Rectangle 8"/>
-          <p:cNvSpPr/>
-          <p:nvPr/>
-        </p:nvSpPr>
-        <p:spPr>
-          <a:xfrm>
-            <a:off x="3259335" y="1339453"/>
-            <a:ext cx="2624328" cy="2834640"/>
-          </a:xfrm>
-          <a:prstGeom prst="roundRect">
-            <a:avLst/>
-          </a:prstGeom>
-          <a:solidFill>
-            <a:srgbClr val="E6D2CA"/>
-          </a:solidFill>
-          <a:ln w="12700">
-            <a:solidFill>
-              <a:srgbClr val="D7E0CE"/>
-            </a:solidFill>
-          </a:ln>
-        </p:spPr>
-        <p:style>
-          <a:lnRef idx="1">
-            <a:schemeClr val="accent1"/>
-          </a:lnRef>
-          <a:fillRef idx="3">
-            <a:schemeClr val="accent1"/>
-          </a:fillRef>
-          <a:effectRef idx="2">
-            <a:schemeClr val="accent1"/>
-          </a:effectRef>
-          <a:fontRef idx="minor">
-            <a:schemeClr val="lt1"/>
-          </a:fontRef>
-        </p:style>
-        <p:txBody>
-          <a:bodyPr rtlCol="0" anchor="ctr"/>
-          <a:lstStyle/>
-          <a:p>
-            <a:pPr algn="ctr"/>
-          </a:p>
-        </p:txBody>
-      </p:sp>
-      <p:sp>
-        <p:nvSpPr>
-          <p:cNvPr id="10" name="TextBox 9"/>
-          <p:cNvSpPr txBox="1"/>
-          <p:nvPr/>
-        </p:nvSpPr>
-        <p:spPr>
-          <a:xfrm>
-            <a:off x="3442215" y="1518046"/>
-            <a:ext cx="2258568" cy="457200"/>
-          </a:xfrm>
-          <a:prstGeom prst="rect">
-            <a:avLst/>
-          </a:prstGeom>
-          <a:noFill/>
-        </p:spPr>
-        <p:txBody>
-          <a:bodyPr wrap="square" tIns="0" bIns="0" lIns="0" rIns="0">
-            <a:spAutoFit/>
-          </a:bodyPr>
-          <a:lstStyle/>
+          </a:p>
           <a:p>
             <a:pPr algn="l">
               <a:lnSpc>
                 <a:spcPct val="120000"/>
               </a:lnSpc>
-              <a:defRPr sz="1800" b="1" i="0">
-                <a:solidFill>
-                  <a:srgbClr val="1D291C"/>
+              <a:defRPr sz="1500" b="0" i="0">
+                <a:solidFill>
+                  <a:srgbClr val="3D4A40"/>
                 </a:solidFill>
                 <a:latin typeface="Arimo"/>
               </a:defRPr>
             </a:pPr>
             <a:r>
-              <a:rPr sz="1800" b="1" i="0">
-                <a:solidFill>
-                  <a:srgbClr val="1D291C"/>
+              <a:rPr sz="1500" b="0" i="0">
+                <a:solidFill>
+                  <a:srgbClr val="3D4A40"/>
                 </a:solidFill>
                 <a:latin typeface="Arimo"/>
               </a:rPr>
-              <a:t>Осветление кожи</a:t>
-            </a:r>
-          </a:p>
-        </p:txBody>
-      </p:sp>
-      <p:sp>
-        <p:nvSpPr>
-          <p:cNvPr id="11" name="TextBox 10"/>
-          <p:cNvSpPr txBox="1"/>
-          <p:nvPr/>
-        </p:nvSpPr>
-        <p:spPr>
-          <a:xfrm>
-            <a:off x="3442215" y="2053828"/>
-            <a:ext cx="2258568" cy="1920240"/>
-          </a:xfrm>
-          <a:prstGeom prst="rect">
-            <a:avLst/>
-          </a:prstGeom>
-          <a:noFill/>
-        </p:spPr>
-        <p:txBody>
-          <a:bodyPr wrap="square" tIns="0" bIns="0" lIns="0" rIns="0">
-            <a:spAutoFit/>
-          </a:bodyPr>
-          <a:lstStyle/>
+              <a:t>• Концентрации от 2% до 5% достоверно снижают выраженность гиперпигментации.</a:t>
+            </a:r>
+          </a:p>
           <a:p>
             <a:pPr algn="l">
               <a:lnSpc>
                 <a:spcPct val="120000"/>
               </a:lnSpc>
-              <a:defRPr sz="1300" b="0" i="0">
+              <a:defRPr sz="1500" b="0" i="0">
                 <a:solidFill>
                   <a:srgbClr val="3D4A40"/>
                 </a:solidFill>
                 <a:latin typeface="Arimo"/>
               </a:defRPr>
             </a:pPr>
-            <a:r>
-              <a:rPr sz="1300" b="0" i="0">
-                <a:solidFill>
-                  <a:srgbClr val="3D4A40"/>
-                </a:solidFill>
-                <a:latin typeface="Arimo"/>
-              </a:rPr>
-              <a:t>Концентрации от 2% до 5% достоверно снижают выраженность гиперпигментации.</a:t>
-            </a:r>
-          </a:p>
-        </p:txBody>
-      </p:sp>
-      <p:sp>
-        <p:nvSpPr>
-          <p:cNvPr id="12" name="Rounded Rectangle 11"/>
-          <p:cNvSpPr/>
-          <p:nvPr/>
-        </p:nvSpPr>
-        <p:spPr>
-          <a:xfrm>
-            <a:off x="6161484" y="1339453"/>
-            <a:ext cx="2624328" cy="2834640"/>
-          </a:xfrm>
-          <a:prstGeom prst="roundRect">
-            <a:avLst/>
-          </a:prstGeom>
-          <a:solidFill>
-            <a:srgbClr val="E6D2CA"/>
-          </a:solidFill>
-          <a:ln w="12700">
-            <a:solidFill>
-              <a:srgbClr val="D7E0CE"/>
-            </a:solidFill>
-          </a:ln>
-        </p:spPr>
-        <p:style>
-          <a:lnRef idx="1">
-            <a:schemeClr val="accent1"/>
-          </a:lnRef>
-          <a:fillRef idx="3">
-            <a:schemeClr val="accent1"/>
-          </a:fillRef>
-          <a:effectRef idx="2">
-            <a:schemeClr val="accent1"/>
-          </a:effectRef>
-          <a:fontRef idx="minor">
-            <a:schemeClr val="lt1"/>
-          </a:fontRef>
-        </p:style>
-        <p:txBody>
-          <a:bodyPr rtlCol="0" anchor="ctr"/>
-          <a:lstStyle/>
-          <a:p>
-            <a:pPr algn="ctr"/>
-          </a:p>
-        </p:txBody>
-      </p:sp>
-      <p:sp>
-        <p:nvSpPr>
-          <p:cNvPr id="13" name="TextBox 12"/>
-          <p:cNvSpPr txBox="1"/>
-          <p:nvPr/>
-        </p:nvSpPr>
-        <p:spPr>
-          <a:xfrm>
-            <a:off x="6344364" y="1518046"/>
-            <a:ext cx="2258568" cy="457200"/>
-          </a:xfrm>
-          <a:prstGeom prst="rect">
-            <a:avLst/>
-          </a:prstGeom>
-          <a:noFill/>
-        </p:spPr>
-        <p:txBody>
-          <a:bodyPr wrap="square" tIns="0" bIns="0" lIns="0" rIns="0">
-            <a:spAutoFit/>
-          </a:bodyPr>
-          <a:lstStyle/>
+          </a:p>
           <a:p>
             <a:pPr algn="l">
               <a:lnSpc>
                 <a:spcPct val="120000"/>
               </a:lnSpc>
-              <a:defRPr sz="1800" b="1" i="0">
-                <a:solidFill>
-                  <a:srgbClr val="1D291C"/>
+              <a:defRPr sz="1500" b="0" i="0">
+                <a:solidFill>
+                  <a:srgbClr val="3D4A40"/>
                 </a:solidFill>
                 <a:latin typeface="Arimo"/>
               </a:defRPr>
             </a:pPr>
             <a:r>
-              <a:rPr sz="1800" b="1" i="0">
-                <a:solidFill>
-                  <a:srgbClr val="1D291C"/>
+              <a:rPr sz="1500" b="0" i="0">
+                <a:solidFill>
+                  <a:srgbClr val="3D4A40"/>
                 </a:solidFill>
                 <a:latin typeface="Arimo"/>
               </a:rPr>
-              <a:t>Терапия мелазмы</a:t>
-            </a:r>
-          </a:p>
-        </p:txBody>
-      </p:sp>
-      <p:sp>
-        <p:nvSpPr>
-          <p:cNvPr id="14" name="TextBox 13"/>
-          <p:cNvSpPr txBox="1"/>
+              <a:t>• Ниацинамид 4% сопоставим по действию с 4% гидрохиноном при лучшей переносимости.</a:t>
+            </a:r>
+          </a:p>
+        </p:txBody>
+      </p:sp>
+      <p:pic>
+        <p:nvPicPr>
+          <p:cNvPr id="7" name="Picture 6" descr="melanosome_transfer.png"/>
+          <p:cNvPicPr>
+            <a:picLocks noChangeAspect="1"/>
+          </p:cNvPicPr>
           <p:nvPr/>
-        </p:nvSpPr>
-        <p:spPr>
-          <a:xfrm>
-            <a:off x="6344364" y="2053828"/>
-            <a:ext cx="2258568" cy="1920240"/>
+        </p:nvPicPr>
+        <p:blipFill>
+          <a:blip r:embed="rId2"/>
+          <a:stretch>
+            <a:fillRect/>
+          </a:stretch>
+        </p:blipFill>
+        <p:spPr>
+          <a:xfrm>
+            <a:off x="5179218" y="1339453"/>
+            <a:ext cx="3607593" cy="2857500"/>
           </a:xfrm>
           <a:prstGeom prst="rect">
             <a:avLst/>
           </a:prstGeom>
-          <a:noFill/>
-        </p:spPr>
-        <p:txBody>
-          <a:bodyPr wrap="square" tIns="0" bIns="0" lIns="0" rIns="0">
-            <a:spAutoFit/>
-          </a:bodyPr>
-          <a:lstStyle/>
-          <a:p>
-            <a:pPr algn="l">
-              <a:lnSpc>
-                <a:spcPct val="120000"/>
-              </a:lnSpc>
-              <a:defRPr sz="1300" b="0" i="0">
-                <a:solidFill>
-                  <a:srgbClr val="3D4A40"/>
-                </a:solidFill>
-                <a:latin typeface="Arimo"/>
-              </a:defRPr>
-            </a:pPr>
-            <a:r>
-              <a:rPr sz="1300" b="0" i="0">
-                <a:solidFill>
-                  <a:srgbClr val="3D4A40"/>
-                </a:solidFill>
-                <a:latin typeface="Arimo"/>
-              </a:rPr>
-              <a:t>Ниацинамид 4% сопоставим по действию с 4% гидрохиноном при лучшей переносимости.</a:t>
-            </a:r>
-          </a:p>
-        </p:txBody>
-      </p:sp>
+        </p:spPr>
+      </p:pic>
     </p:spTree>
   </p:cSld>
   <p:clrMapOvr>
@@ -4954,7 +4651,7 @@
                 </a:solidFill>
                 <a:latin typeface="Arimo"/>
               </a:rPr>
-              <a:t>ТОЛЬКО ДЛЯ ПРАКТИКУЮЩИХ СПЕЦИАЛИСТОВ</a:t>
+              <a:t>ТОЛЬКО ДЛЯ ПРАКТИКУЮЩИХ СПЕЦИАЛИСТОВ | SERVIER MEDICAL ART BY LES LABORATOIRES SERVIER (CC-BY 4.0)</a:t>
             </a:r>
           </a:p>
         </p:txBody>
@@ -5032,7 +4729,7 @@
               </a:lnSpc>
               <a:defRPr sz="2600" b="1" i="0">
                 <a:solidFill>
-                  <a:srgbClr val="1D291C"/>
+                  <a:srgbClr val="2C3440"/>
                 </a:solidFill>
                 <a:latin typeface="Arimo"/>
               </a:defRPr>
@@ -5040,7 +4737,7 @@
             <a:r>
               <a:rPr sz="2600" b="1" i="0">
                 <a:solidFill>
-                  <a:srgbClr val="1D291C"/>
+                  <a:srgbClr val="2C3440"/>
                 </a:solidFill>
                 <a:latin typeface="Arimo"/>
               </a:rPr>
@@ -5209,67 +4906,30 @@
           </a:p>
         </p:txBody>
       </p:sp>
-      <p:sp>
-        <p:nvSpPr>
-          <p:cNvPr id="7" name="Rounded Rectangle 6"/>
-          <p:cNvSpPr/>
+      <p:pic>
+        <p:nvPicPr>
+          <p:cNvPr id="7" name="Picture 6" descr="skin_layers_turnover.png"/>
+          <p:cNvPicPr>
+            <a:picLocks noChangeAspect="1"/>
+          </p:cNvPicPr>
           <p:nvPr/>
-        </p:nvSpPr>
+        </p:nvPicPr>
+        <p:blipFill>
+          <a:blip r:embed="rId2"/>
+          <a:stretch>
+            <a:fillRect/>
+          </a:stretch>
+        </p:blipFill>
         <p:spPr>
           <a:xfrm>
             <a:off x="5179218" y="1339453"/>
             <a:ext cx="3607593" cy="2857500"/>
           </a:xfrm>
-          <a:prstGeom prst="roundRect">
+          <a:prstGeom prst="rect">
             <a:avLst/>
           </a:prstGeom>
-          <a:solidFill>
-            <a:srgbClr val="D7E0CE"/>
-          </a:solidFill>
-          <a:ln w="12700">
-            <a:solidFill>
-              <a:srgbClr val="D7E0CE"/>
-            </a:solidFill>
-          </a:ln>
-        </p:spPr>
-        <p:style>
-          <a:lnRef idx="1">
-            <a:schemeClr val="accent1"/>
-          </a:lnRef>
-          <a:fillRef idx="3">
-            <a:schemeClr val="accent1"/>
-          </a:fillRef>
-          <a:effectRef idx="2">
-            <a:schemeClr val="accent1"/>
-          </a:effectRef>
-          <a:fontRef idx="minor">
-            <a:schemeClr val="lt1"/>
-          </a:fontRef>
-        </p:style>
-        <p:txBody>
-          <a:bodyPr rtlCol="0" anchor="ctr" wrap="square"/>
-          <a:lstStyle/>
-          <a:p>
-            <a:pPr algn="ctr">
-              <a:defRPr sz="1300" b="1">
-                <a:solidFill>
-                  <a:srgbClr val="6D8470"/>
-                </a:solidFill>
-                <a:latin typeface="Arimo"/>
-              </a:defRPr>
-            </a:pPr>
-            <a:r>
-              <a:rPr sz="1300" b="1">
-                <a:solidFill>
-                  <a:srgbClr val="6D8470"/>
-                </a:solidFill>
-                <a:latin typeface="Arimo"/>
-              </a:rPr>
-              <a:t>[Placeholder] Гистологическая картина омоложения кожи</a:t>
-            </a:r>
-          </a:p>
-        </p:txBody>
-      </p:sp>
+        </p:spPr>
+      </p:pic>
     </p:spTree>
   </p:cSld>
   <p:clrMapOvr>
@@ -5414,7 +5074,7 @@
               </a:lnSpc>
               <a:defRPr sz="2600" b="1" i="0">
                 <a:solidFill>
-                  <a:srgbClr val="1D291C"/>
+                  <a:srgbClr val="2C3440"/>
                 </a:solidFill>
                 <a:latin typeface="Arimo"/>
               </a:defRPr>
@@ -5422,7 +5082,7 @@
             <a:r>
               <a:rPr sz="2600" b="1" i="0">
                 <a:solidFill>
-                  <a:srgbClr val="1D291C"/>
+                  <a:srgbClr val="2C3440"/>
                 </a:solidFill>
                 <a:latin typeface="Arimo"/>
               </a:rPr>
@@ -5800,7 +5460,7 @@
               </a:lnSpc>
               <a:defRPr sz="2600" b="1" i="0">
                 <a:solidFill>
-                  <a:srgbClr val="1D291C"/>
+                  <a:srgbClr val="2C3440"/>
                 </a:solidFill>
                 <a:latin typeface="Arimo"/>
               </a:defRPr>
@@ -5808,7 +5468,7 @@
             <a:r>
               <a:rPr sz="2600" b="1" i="0">
                 <a:solidFill>
-                  <a:srgbClr val="1D291C"/>
+                  <a:srgbClr val="2C3440"/>
                 </a:solidFill>
                 <a:latin typeface="Arimo"/>
               </a:rPr>

--- a/06_render/out/deck_niacinamide.pptx
+++ b/06_render/out/deck_niacinamide.pptx
@@ -3148,9 +3148,33 @@
           </a:p>
         </p:txBody>
       </p:sp>
-      <p:sp>
-        <p:nvSpPr>
-          <p:cNvPr id="3" name="TextBox 2"/>
+      <p:pic>
+        <p:nvPicPr>
+          <p:cNvPr id="3" name="Picture 2" descr="descriptor_2C3440.png"/>
+          <p:cNvPicPr>
+            <a:picLocks noChangeAspect="1"/>
+          </p:cNvPicPr>
+          <p:nvPr/>
+        </p:nvPicPr>
+        <p:blipFill>
+          <a:blip r:embed="rId2"/>
+          <a:stretch>
+            <a:fillRect/>
+          </a:stretch>
+        </p:blipFill>
+        <p:spPr>
+          <a:xfrm>
+            <a:off x="357187" y="3661171"/>
+            <a:ext cx="3107531" cy="776882"/>
+          </a:xfrm>
+          <a:prstGeom prst="rect">
+            <a:avLst/>
+          </a:prstGeom>
+        </p:spPr>
+      </p:pic>
+      <p:sp>
+        <p:nvSpPr>
+          <p:cNvPr id="4" name="TextBox 3"/>
           <p:cNvSpPr txBox="1"/>
           <p:nvPr/>
         </p:nvSpPr>
@@ -3195,7 +3219,7 @@
       </p:sp>
       <p:sp>
         <p:nvSpPr>
-          <p:cNvPr id="4" name="TextBox 3"/>
+          <p:cNvPr id="5" name="TextBox 4"/>
           <p:cNvSpPr txBox="1"/>
           <p:nvPr/>
         </p:nvSpPr>
@@ -3240,7 +3264,7 @@
       </p:sp>
       <p:sp>
         <p:nvSpPr>
-          <p:cNvPr id="5" name="TextBox 4"/>
+          <p:cNvPr id="6" name="TextBox 5"/>
           <p:cNvSpPr txBox="1"/>
           <p:nvPr/>
         </p:nvSpPr>
@@ -3285,7 +3309,7 @@
       </p:sp>
       <p:sp>
         <p:nvSpPr>
-          <p:cNvPr id="6" name="Rounded Rectangle 5"/>
+          <p:cNvPr id="7" name="Rounded Rectangle 6"/>
           <p:cNvSpPr/>
           <p:nvPr/>
         </p:nvSpPr>
@@ -3415,9 +3439,33 @@
           </a:p>
         </p:txBody>
       </p:sp>
-      <p:sp>
-        <p:nvSpPr>
-          <p:cNvPr id="3" name="TextBox 2"/>
+      <p:pic>
+        <p:nvPicPr>
+          <p:cNvPr id="3" name="Picture 2" descr="horizontal_2C3440.png"/>
+          <p:cNvPicPr>
+            <a:picLocks noChangeAspect="1"/>
+          </p:cNvPicPr>
+          <p:nvPr/>
+        </p:nvPicPr>
+        <p:blipFill>
+          <a:blip r:embed="rId2"/>
+          <a:stretch>
+            <a:fillRect/>
+          </a:stretch>
+        </p:blipFill>
+        <p:spPr>
+          <a:xfrm>
+            <a:off x="357187" y="982265"/>
+            <a:ext cx="2009179" cy="482203"/>
+          </a:xfrm>
+          <a:prstGeom prst="rect">
+            <a:avLst/>
+          </a:prstGeom>
+        </p:spPr>
+      </p:pic>
+      <p:sp>
+        <p:nvSpPr>
+          <p:cNvPr id="4" name="TextBox 3"/>
           <p:cNvSpPr txBox="1"/>
           <p:nvPr/>
         </p:nvSpPr>
@@ -3462,7 +3510,7 @@
       </p:sp>
       <p:sp>
         <p:nvSpPr>
-          <p:cNvPr id="4" name="TextBox 3"/>
+          <p:cNvPr id="5" name="TextBox 4"/>
           <p:cNvSpPr txBox="1"/>
           <p:nvPr/>
         </p:nvSpPr>
@@ -3507,7 +3555,7 @@
       </p:sp>
       <p:sp>
         <p:nvSpPr>
-          <p:cNvPr id="5" name="TextBox 4"/>
+          <p:cNvPr id="6" name="TextBox 5"/>
           <p:cNvSpPr txBox="1"/>
           <p:nvPr/>
         </p:nvSpPr>
@@ -3584,7 +3632,7 @@
         </p:nvSpPr>
         <p:spPr>
           <a:xfrm>
-            <a:off x="357187" y="4643437"/>
+            <a:off x="357187" y="4464843"/>
             <a:ext cx="4572000" cy="274320"/>
           </a:xfrm>
           <a:prstGeom prst="rect">
@@ -3629,7 +3677,7 @@
         </p:nvSpPr>
         <p:spPr>
           <a:xfrm>
-            <a:off x="5029200" y="4643437"/>
+            <a:off x="5029200" y="4464843"/>
             <a:ext cx="3749039" cy="274320"/>
           </a:xfrm>
           <a:prstGeom prst="rect">
@@ -3668,14 +3716,81 @@
       </p:sp>
       <p:sp>
         <p:nvSpPr>
-          <p:cNvPr id="4" name="TextBox 3"/>
+          <p:cNvPr id="4" name="Rectangle 3"/>
+          <p:cNvSpPr/>
+          <p:nvPr/>
+        </p:nvSpPr>
+        <p:spPr>
+          <a:xfrm>
+            <a:off x="357187" y="4732734"/>
+            <a:ext cx="8429625" cy="8929"/>
+          </a:xfrm>
+          <a:prstGeom prst="rect">
+            <a:avLst/>
+          </a:prstGeom>
+          <a:solidFill>
+            <a:srgbClr val="D7E0CE"/>
+          </a:solidFill>
+          <a:ln>
+            <a:noFill/>
+          </a:ln>
+        </p:spPr>
+        <p:style>
+          <a:lnRef idx="1">
+            <a:schemeClr val="accent1"/>
+          </a:lnRef>
+          <a:fillRef idx="3">
+            <a:schemeClr val="accent1"/>
+          </a:fillRef>
+          <a:effectRef idx="2">
+            <a:schemeClr val="accent1"/>
+          </a:effectRef>
+          <a:fontRef idx="minor">
+            <a:schemeClr val="lt1"/>
+          </a:fontRef>
+        </p:style>
+        <p:txBody>
+          <a:bodyPr rtlCol="0" anchor="ctr"/>
+          <a:lstStyle/>
+          <a:p>
+            <a:pPr algn="ctr"/>
+          </a:p>
+        </p:txBody>
+      </p:sp>
+      <p:pic>
+        <p:nvPicPr>
+          <p:cNvPr id="5" name="Picture 4" descr="mark_6D8470.png"/>
+          <p:cNvPicPr>
+            <a:picLocks noChangeAspect="1"/>
+          </p:cNvPicPr>
+          <p:nvPr/>
+        </p:nvPicPr>
+        <p:blipFill>
+          <a:blip r:embed="rId2"/>
+          <a:stretch>
+            <a:fillRect/>
+          </a:stretch>
+        </p:blipFill>
+        <p:spPr>
+          <a:xfrm>
+            <a:off x="357187" y="4848820"/>
+            <a:ext cx="178593" cy="178593"/>
+          </a:xfrm>
+          <a:prstGeom prst="rect">
+            <a:avLst/>
+          </a:prstGeom>
+        </p:spPr>
+      </p:pic>
+      <p:sp>
+        <p:nvSpPr>
+          <p:cNvPr id="6" name="TextBox 5"/>
           <p:cNvSpPr txBox="1"/>
           <p:nvPr/>
         </p:nvSpPr>
         <p:spPr>
           <a:xfrm>
-            <a:off x="357187" y="357187"/>
-            <a:ext cx="8429625" cy="401835"/>
+            <a:off x="607218" y="4830960"/>
+            <a:ext cx="1785937" cy="178593"/>
           </a:xfrm>
           <a:prstGeom prst="rect">
             <a:avLst/>
@@ -3692,35 +3807,35 @@
               <a:lnSpc>
                 <a:spcPct val="120000"/>
               </a:lnSpc>
-              <a:defRPr sz="2600" b="1" i="0">
-                <a:solidFill>
-                  <a:srgbClr val="2C3440"/>
-                </a:solidFill>
-                <a:latin typeface="Arimo"/>
-              </a:defRPr>
-            </a:pPr>
-            <a:r>
-              <a:rPr sz="2600" b="1" i="0">
-                <a:solidFill>
-                  <a:srgbClr val="2C3440"/>
+              <a:defRPr sz="1100" b="1" i="0">
+                <a:solidFill>
+                  <a:srgbClr val="3D4A40"/>
+                </a:solidFill>
+                <a:latin typeface="Arimo"/>
+              </a:defRPr>
+            </a:pPr>
+            <a:r>
+              <a:rPr sz="1100" b="1" i="0">
+                <a:solidFill>
+                  <a:srgbClr val="3D4A40"/>
                 </a:solidFill>
                 <a:latin typeface="Arimo"/>
               </a:rPr>
-              <a:t>Восстановление барьерной функции</a:t>
-            </a:r>
-          </a:p>
-        </p:txBody>
-      </p:sp>
-      <p:sp>
-        <p:nvSpPr>
-          <p:cNvPr id="5" name="TextBox 4"/>
+              <a:t>YM PROSKIN</a:t>
+            </a:r>
+          </a:p>
+        </p:txBody>
+      </p:sp>
+      <p:sp>
+        <p:nvSpPr>
+          <p:cNvPr id="7" name="TextBox 6"/>
           <p:cNvSpPr txBox="1"/>
           <p:nvPr/>
         </p:nvSpPr>
         <p:spPr>
           <a:xfrm>
-            <a:off x="357187" y="803671"/>
-            <a:ext cx="8429625" cy="267890"/>
+            <a:off x="8251031" y="4830960"/>
+            <a:ext cx="535781" cy="178593"/>
           </a:xfrm>
           <a:prstGeom prst="rect">
             <a:avLst/>
@@ -3733,11 +3848,11 @@
           </a:bodyPr>
           <a:lstStyle/>
           <a:p>
-            <a:pPr algn="l">
-              <a:lnSpc>
-                <a:spcPct val="120000"/>
-              </a:lnSpc>
-              <a:defRPr sz="1500" b="0" i="0">
+            <a:pPr algn="r">
+              <a:lnSpc>
+                <a:spcPct val="120000"/>
+              </a:lnSpc>
+              <a:defRPr sz="1100" b="0" i="0">
                 <a:solidFill>
                   <a:srgbClr val="6D8470"/>
                 </a:solidFill>
@@ -3745,27 +3860,27 @@
               </a:defRPr>
             </a:pPr>
             <a:r>
-              <a:rPr sz="1500" b="0" i="0">
+              <a:rPr sz="1100" b="0" i="0">
                 <a:solidFill>
                   <a:srgbClr val="6D8470"/>
                 </a:solidFill>
                 <a:latin typeface="Arimo"/>
               </a:rPr>
-              <a:t>Стимуляция синтеза липидов рогового слоя и гидратация кожи</a:t>
-            </a:r>
-          </a:p>
-        </p:txBody>
-      </p:sp>
-      <p:sp>
-        <p:nvSpPr>
-          <p:cNvPr id="6" name="TextBox 5"/>
+              <a:t>3</a:t>
+            </a:r>
+          </a:p>
+        </p:txBody>
+      </p:sp>
+      <p:sp>
+        <p:nvSpPr>
+          <p:cNvPr id="8" name="TextBox 7"/>
           <p:cNvSpPr txBox="1"/>
           <p:nvPr/>
         </p:nvSpPr>
         <p:spPr>
           <a:xfrm>
-            <a:off x="357187" y="1339453"/>
-            <a:ext cx="4572000" cy="2926080"/>
+            <a:off x="357187" y="357187"/>
+            <a:ext cx="8429625" cy="401835"/>
           </a:xfrm>
           <a:prstGeom prst="rect">
             <a:avLst/>
@@ -3782,6 +3897,96 @@
               <a:lnSpc>
                 <a:spcPct val="120000"/>
               </a:lnSpc>
+              <a:defRPr sz="2600" b="1" i="0">
+                <a:solidFill>
+                  <a:srgbClr val="2C3440"/>
+                </a:solidFill>
+                <a:latin typeface="Arimo"/>
+              </a:defRPr>
+            </a:pPr>
+            <a:r>
+              <a:rPr sz="2600" b="1" i="0">
+                <a:solidFill>
+                  <a:srgbClr val="2C3440"/>
+                </a:solidFill>
+                <a:latin typeface="Arimo"/>
+              </a:rPr>
+              <a:t>Восстановление барьерной функции</a:t>
+            </a:r>
+          </a:p>
+        </p:txBody>
+      </p:sp>
+      <p:sp>
+        <p:nvSpPr>
+          <p:cNvPr id="9" name="TextBox 8"/>
+          <p:cNvSpPr txBox="1"/>
+          <p:nvPr/>
+        </p:nvSpPr>
+        <p:spPr>
+          <a:xfrm>
+            <a:off x="357187" y="803671"/>
+            <a:ext cx="8429625" cy="267890"/>
+          </a:xfrm>
+          <a:prstGeom prst="rect">
+            <a:avLst/>
+          </a:prstGeom>
+          <a:noFill/>
+        </p:spPr>
+        <p:txBody>
+          <a:bodyPr wrap="square" tIns="0" bIns="0" lIns="0" rIns="0">
+            <a:spAutoFit/>
+          </a:bodyPr>
+          <a:lstStyle/>
+          <a:p>
+            <a:pPr algn="l">
+              <a:lnSpc>
+                <a:spcPct val="120000"/>
+              </a:lnSpc>
+              <a:defRPr sz="1500" b="0" i="0">
+                <a:solidFill>
+                  <a:srgbClr val="6D8470"/>
+                </a:solidFill>
+                <a:latin typeface="Arimo"/>
+              </a:defRPr>
+            </a:pPr>
+            <a:r>
+              <a:rPr sz="1500" b="0" i="0">
+                <a:solidFill>
+                  <a:srgbClr val="6D8470"/>
+                </a:solidFill>
+                <a:latin typeface="Arimo"/>
+              </a:rPr>
+              <a:t>Стимуляция синтеза липидов рогового слоя и гидратация кожи</a:t>
+            </a:r>
+          </a:p>
+        </p:txBody>
+      </p:sp>
+      <p:sp>
+        <p:nvSpPr>
+          <p:cNvPr id="10" name="TextBox 9"/>
+          <p:cNvSpPr txBox="1"/>
+          <p:nvPr/>
+        </p:nvSpPr>
+        <p:spPr>
+          <a:xfrm>
+            <a:off x="357187" y="1339453"/>
+            <a:ext cx="4572000" cy="2926080"/>
+          </a:xfrm>
+          <a:prstGeom prst="rect">
+            <a:avLst/>
+          </a:prstGeom>
+          <a:noFill/>
+        </p:spPr>
+        <p:txBody>
+          <a:bodyPr wrap="square" tIns="0" bIns="0" lIns="0" rIns="0">
+            <a:spAutoFit/>
+          </a:bodyPr>
+          <a:lstStyle/>
+          <a:p>
+            <a:pPr algn="l">
+              <a:lnSpc>
+                <a:spcPct val="120000"/>
+              </a:lnSpc>
               <a:defRPr sz="1500" b="0" i="0">
                 <a:solidFill>
                   <a:srgbClr val="3D4A40"/>
@@ -3873,14 +4078,14 @@
       </p:sp>
       <p:pic>
         <p:nvPicPr>
-          <p:cNvPr id="7" name="Picture 6" descr="ceramide_synthesis.png"/>
+          <p:cNvPr id="11" name="Picture 10" descr="ceramide_synthesis.png"/>
           <p:cNvPicPr>
             <a:picLocks noChangeAspect="1"/>
           </p:cNvPicPr>
           <p:nvPr/>
         </p:nvPicPr>
         <p:blipFill>
-          <a:blip r:embed="rId2"/>
+          <a:blip r:embed="rId3"/>
           <a:stretch>
             <a:fillRect/>
           </a:stretch>
@@ -3929,7 +4134,7 @@
         </p:nvSpPr>
         <p:spPr>
           <a:xfrm>
-            <a:off x="357187" y="4643437"/>
+            <a:off x="357187" y="4464843"/>
             <a:ext cx="4572000" cy="274320"/>
           </a:xfrm>
           <a:prstGeom prst="rect">
@@ -3974,7 +4179,7 @@
         </p:nvSpPr>
         <p:spPr>
           <a:xfrm>
-            <a:off x="5029200" y="4643437"/>
+            <a:off x="5029200" y="4464843"/>
             <a:ext cx="3749039" cy="274320"/>
           </a:xfrm>
           <a:prstGeom prst="rect">
@@ -4013,14 +4218,81 @@
       </p:sp>
       <p:sp>
         <p:nvSpPr>
-          <p:cNvPr id="4" name="TextBox 3"/>
+          <p:cNvPr id="4" name="Rectangle 3"/>
+          <p:cNvSpPr/>
+          <p:nvPr/>
+        </p:nvSpPr>
+        <p:spPr>
+          <a:xfrm>
+            <a:off x="357187" y="4732734"/>
+            <a:ext cx="8429625" cy="8929"/>
+          </a:xfrm>
+          <a:prstGeom prst="rect">
+            <a:avLst/>
+          </a:prstGeom>
+          <a:solidFill>
+            <a:srgbClr val="D7E0CE"/>
+          </a:solidFill>
+          <a:ln>
+            <a:noFill/>
+          </a:ln>
+        </p:spPr>
+        <p:style>
+          <a:lnRef idx="1">
+            <a:schemeClr val="accent1"/>
+          </a:lnRef>
+          <a:fillRef idx="3">
+            <a:schemeClr val="accent1"/>
+          </a:fillRef>
+          <a:effectRef idx="2">
+            <a:schemeClr val="accent1"/>
+          </a:effectRef>
+          <a:fontRef idx="minor">
+            <a:schemeClr val="lt1"/>
+          </a:fontRef>
+        </p:style>
+        <p:txBody>
+          <a:bodyPr rtlCol="0" anchor="ctr"/>
+          <a:lstStyle/>
+          <a:p>
+            <a:pPr algn="ctr"/>
+          </a:p>
+        </p:txBody>
+      </p:sp>
+      <p:pic>
+        <p:nvPicPr>
+          <p:cNvPr id="5" name="Picture 4" descr="mark_6D8470.png"/>
+          <p:cNvPicPr>
+            <a:picLocks noChangeAspect="1"/>
+          </p:cNvPicPr>
+          <p:nvPr/>
+        </p:nvPicPr>
+        <p:blipFill>
+          <a:blip r:embed="rId2"/>
+          <a:stretch>
+            <a:fillRect/>
+          </a:stretch>
+        </p:blipFill>
+        <p:spPr>
+          <a:xfrm>
+            <a:off x="357187" y="4848820"/>
+            <a:ext cx="178593" cy="178593"/>
+          </a:xfrm>
+          <a:prstGeom prst="rect">
+            <a:avLst/>
+          </a:prstGeom>
+        </p:spPr>
+      </p:pic>
+      <p:sp>
+        <p:nvSpPr>
+          <p:cNvPr id="6" name="TextBox 5"/>
           <p:cNvSpPr txBox="1"/>
           <p:nvPr/>
         </p:nvSpPr>
         <p:spPr>
           <a:xfrm>
-            <a:off x="357187" y="357187"/>
-            <a:ext cx="8429625" cy="401835"/>
+            <a:off x="607218" y="4830960"/>
+            <a:ext cx="1785937" cy="178593"/>
           </a:xfrm>
           <a:prstGeom prst="rect">
             <a:avLst/>
@@ -4037,35 +4309,35 @@
               <a:lnSpc>
                 <a:spcPct val="120000"/>
               </a:lnSpc>
-              <a:defRPr sz="2600" b="1" i="0">
-                <a:solidFill>
-                  <a:srgbClr val="2C3440"/>
-                </a:solidFill>
-                <a:latin typeface="Arimo"/>
-              </a:defRPr>
-            </a:pPr>
-            <a:r>
-              <a:rPr sz="2600" b="1" i="0">
-                <a:solidFill>
-                  <a:srgbClr val="2C3440"/>
+              <a:defRPr sz="1100" b="1" i="0">
+                <a:solidFill>
+                  <a:srgbClr val="3D4A40"/>
+                </a:solidFill>
+                <a:latin typeface="Arimo"/>
+              </a:defRPr>
+            </a:pPr>
+            <a:r>
+              <a:rPr sz="1100" b="1" i="0">
+                <a:solidFill>
+                  <a:srgbClr val="3D4A40"/>
                 </a:solidFill>
                 <a:latin typeface="Arimo"/>
               </a:rPr>
-              <a:t>Терапия акне и себорегуляция</a:t>
-            </a:r>
-          </a:p>
-        </p:txBody>
-      </p:sp>
-      <p:sp>
-        <p:nvSpPr>
-          <p:cNvPr id="5" name="TextBox 4"/>
+              <a:t>YM PROSKIN</a:t>
+            </a:r>
+          </a:p>
+        </p:txBody>
+      </p:sp>
+      <p:sp>
+        <p:nvSpPr>
+          <p:cNvPr id="7" name="TextBox 6"/>
           <p:cNvSpPr txBox="1"/>
           <p:nvPr/>
         </p:nvSpPr>
         <p:spPr>
           <a:xfrm>
-            <a:off x="357187" y="803671"/>
-            <a:ext cx="8429625" cy="267890"/>
+            <a:off x="8251031" y="4830960"/>
+            <a:ext cx="535781" cy="178593"/>
           </a:xfrm>
           <a:prstGeom prst="rect">
             <a:avLst/>
@@ -4078,11 +4350,11 @@
           </a:bodyPr>
           <a:lstStyle/>
           <a:p>
-            <a:pPr algn="l">
-              <a:lnSpc>
-                <a:spcPct val="120000"/>
-              </a:lnSpc>
-              <a:defRPr sz="1500" b="0" i="0">
+            <a:pPr algn="r">
+              <a:lnSpc>
+                <a:spcPct val="120000"/>
+              </a:lnSpc>
+              <a:defRPr sz="1100" b="0" i="0">
                 <a:solidFill>
                   <a:srgbClr val="6D8470"/>
                 </a:solidFill>
@@ -4090,27 +4362,27 @@
               </a:defRPr>
             </a:pPr>
             <a:r>
-              <a:rPr sz="1500" b="0" i="0">
+              <a:rPr sz="1100" b="0" i="0">
                 <a:solidFill>
                   <a:srgbClr val="6D8470"/>
                 </a:solidFill>
                 <a:latin typeface="Arimo"/>
               </a:rPr>
-              <a:t>Клиническое применение при воспалительных поражениях кожи</a:t>
-            </a:r>
-          </a:p>
-        </p:txBody>
-      </p:sp>
-      <p:sp>
-        <p:nvSpPr>
-          <p:cNvPr id="6" name="TextBox 5"/>
+              <a:t>4</a:t>
+            </a:r>
+          </a:p>
+        </p:txBody>
+      </p:sp>
+      <p:sp>
+        <p:nvSpPr>
+          <p:cNvPr id="8" name="TextBox 7"/>
           <p:cNvSpPr txBox="1"/>
           <p:nvPr/>
         </p:nvSpPr>
         <p:spPr>
           <a:xfrm>
-            <a:off x="357187" y="1339453"/>
-            <a:ext cx="4572000" cy="2926080"/>
+            <a:off x="357187" y="357187"/>
+            <a:ext cx="8429625" cy="401835"/>
           </a:xfrm>
           <a:prstGeom prst="rect">
             <a:avLst/>
@@ -4127,6 +4399,96 @@
               <a:lnSpc>
                 <a:spcPct val="120000"/>
               </a:lnSpc>
+              <a:defRPr sz="2600" b="1" i="0">
+                <a:solidFill>
+                  <a:srgbClr val="2C3440"/>
+                </a:solidFill>
+                <a:latin typeface="Arimo"/>
+              </a:defRPr>
+            </a:pPr>
+            <a:r>
+              <a:rPr sz="2600" b="1" i="0">
+                <a:solidFill>
+                  <a:srgbClr val="2C3440"/>
+                </a:solidFill>
+                <a:latin typeface="Arimo"/>
+              </a:rPr>
+              <a:t>Терапия акне и себорегуляция</a:t>
+            </a:r>
+          </a:p>
+        </p:txBody>
+      </p:sp>
+      <p:sp>
+        <p:nvSpPr>
+          <p:cNvPr id="9" name="TextBox 8"/>
+          <p:cNvSpPr txBox="1"/>
+          <p:nvPr/>
+        </p:nvSpPr>
+        <p:spPr>
+          <a:xfrm>
+            <a:off x="357187" y="803671"/>
+            <a:ext cx="8429625" cy="267890"/>
+          </a:xfrm>
+          <a:prstGeom prst="rect">
+            <a:avLst/>
+          </a:prstGeom>
+          <a:noFill/>
+        </p:spPr>
+        <p:txBody>
+          <a:bodyPr wrap="square" tIns="0" bIns="0" lIns="0" rIns="0">
+            <a:spAutoFit/>
+          </a:bodyPr>
+          <a:lstStyle/>
+          <a:p>
+            <a:pPr algn="l">
+              <a:lnSpc>
+                <a:spcPct val="120000"/>
+              </a:lnSpc>
+              <a:defRPr sz="1500" b="0" i="0">
+                <a:solidFill>
+                  <a:srgbClr val="6D8470"/>
+                </a:solidFill>
+                <a:latin typeface="Arimo"/>
+              </a:defRPr>
+            </a:pPr>
+            <a:r>
+              <a:rPr sz="1500" b="0" i="0">
+                <a:solidFill>
+                  <a:srgbClr val="6D8470"/>
+                </a:solidFill>
+                <a:latin typeface="Arimo"/>
+              </a:rPr>
+              <a:t>Клиническое применение при воспалительных поражениях кожи</a:t>
+            </a:r>
+          </a:p>
+        </p:txBody>
+      </p:sp>
+      <p:sp>
+        <p:nvSpPr>
+          <p:cNvPr id="10" name="TextBox 9"/>
+          <p:cNvSpPr txBox="1"/>
+          <p:nvPr/>
+        </p:nvSpPr>
+        <p:spPr>
+          <a:xfrm>
+            <a:off x="357187" y="1339453"/>
+            <a:ext cx="4572000" cy="2926080"/>
+          </a:xfrm>
+          <a:prstGeom prst="rect">
+            <a:avLst/>
+          </a:prstGeom>
+          <a:noFill/>
+        </p:spPr>
+        <p:txBody>
+          <a:bodyPr wrap="square" tIns="0" bIns="0" lIns="0" rIns="0">
+            <a:spAutoFit/>
+          </a:bodyPr>
+          <a:lstStyle/>
+          <a:p>
+            <a:pPr algn="l">
+              <a:lnSpc>
+                <a:spcPct val="120000"/>
+              </a:lnSpc>
               <a:defRPr sz="1500" b="0" i="0">
                 <a:solidFill>
                   <a:srgbClr val="3D4A40"/>
@@ -4218,14 +4580,14 @@
       </p:sp>
       <p:pic>
         <p:nvPicPr>
-          <p:cNvPr id="7" name="Picture 6" descr="niacinamide.png"/>
+          <p:cNvPr id="11" name="Picture 10" descr="niacinamide.png"/>
           <p:cNvPicPr>
             <a:picLocks noChangeAspect="1"/>
           </p:cNvPicPr>
           <p:nvPr/>
         </p:nvPicPr>
         <p:blipFill>
-          <a:blip r:embed="rId2"/>
+          <a:blip r:embed="rId3"/>
           <a:stretch>
             <a:fillRect/>
           </a:stretch>
@@ -4274,7 +4636,7 @@
         </p:nvSpPr>
         <p:spPr>
           <a:xfrm>
-            <a:off x="357187" y="4643437"/>
+            <a:off x="357187" y="4464843"/>
             <a:ext cx="4572000" cy="274320"/>
           </a:xfrm>
           <a:prstGeom prst="rect">
@@ -4319,7 +4681,7 @@
         </p:nvSpPr>
         <p:spPr>
           <a:xfrm>
-            <a:off x="5029200" y="4643437"/>
+            <a:off x="5029200" y="4464843"/>
             <a:ext cx="3749039" cy="274320"/>
           </a:xfrm>
           <a:prstGeom prst="rect">
@@ -4358,14 +4720,81 @@
       </p:sp>
       <p:sp>
         <p:nvSpPr>
-          <p:cNvPr id="4" name="TextBox 3"/>
+          <p:cNvPr id="4" name="Rectangle 3"/>
+          <p:cNvSpPr/>
+          <p:nvPr/>
+        </p:nvSpPr>
+        <p:spPr>
+          <a:xfrm>
+            <a:off x="357187" y="4732734"/>
+            <a:ext cx="8429625" cy="8929"/>
+          </a:xfrm>
+          <a:prstGeom prst="rect">
+            <a:avLst/>
+          </a:prstGeom>
+          <a:solidFill>
+            <a:srgbClr val="D7E0CE"/>
+          </a:solidFill>
+          <a:ln>
+            <a:noFill/>
+          </a:ln>
+        </p:spPr>
+        <p:style>
+          <a:lnRef idx="1">
+            <a:schemeClr val="accent1"/>
+          </a:lnRef>
+          <a:fillRef idx="3">
+            <a:schemeClr val="accent1"/>
+          </a:fillRef>
+          <a:effectRef idx="2">
+            <a:schemeClr val="accent1"/>
+          </a:effectRef>
+          <a:fontRef idx="minor">
+            <a:schemeClr val="lt1"/>
+          </a:fontRef>
+        </p:style>
+        <p:txBody>
+          <a:bodyPr rtlCol="0" anchor="ctr"/>
+          <a:lstStyle/>
+          <a:p>
+            <a:pPr algn="ctr"/>
+          </a:p>
+        </p:txBody>
+      </p:sp>
+      <p:pic>
+        <p:nvPicPr>
+          <p:cNvPr id="5" name="Picture 4" descr="mark_6D8470.png"/>
+          <p:cNvPicPr>
+            <a:picLocks noChangeAspect="1"/>
+          </p:cNvPicPr>
+          <p:nvPr/>
+        </p:nvPicPr>
+        <p:blipFill>
+          <a:blip r:embed="rId2"/>
+          <a:stretch>
+            <a:fillRect/>
+          </a:stretch>
+        </p:blipFill>
+        <p:spPr>
+          <a:xfrm>
+            <a:off x="357187" y="4848820"/>
+            <a:ext cx="178593" cy="178593"/>
+          </a:xfrm>
+          <a:prstGeom prst="rect">
+            <a:avLst/>
+          </a:prstGeom>
+        </p:spPr>
+      </p:pic>
+      <p:sp>
+        <p:nvSpPr>
+          <p:cNvPr id="6" name="TextBox 5"/>
           <p:cNvSpPr txBox="1"/>
           <p:nvPr/>
         </p:nvSpPr>
         <p:spPr>
           <a:xfrm>
-            <a:off x="357187" y="357187"/>
-            <a:ext cx="8429625" cy="401835"/>
+            <a:off x="607218" y="4830960"/>
+            <a:ext cx="1785937" cy="178593"/>
           </a:xfrm>
           <a:prstGeom prst="rect">
             <a:avLst/>
@@ -4382,35 +4811,35 @@
               <a:lnSpc>
                 <a:spcPct val="120000"/>
               </a:lnSpc>
-              <a:defRPr sz="2600" b="1" i="0">
-                <a:solidFill>
-                  <a:srgbClr val="2C3440"/>
-                </a:solidFill>
-                <a:latin typeface="Arimo"/>
-              </a:defRPr>
-            </a:pPr>
-            <a:r>
-              <a:rPr sz="2600" b="1" i="0">
-                <a:solidFill>
-                  <a:srgbClr val="2C3440"/>
+              <a:defRPr sz="1100" b="1" i="0">
+                <a:solidFill>
+                  <a:srgbClr val="3D4A40"/>
+                </a:solidFill>
+                <a:latin typeface="Arimo"/>
+              </a:defRPr>
+            </a:pPr>
+            <a:r>
+              <a:rPr sz="1100" b="1" i="0">
+                <a:solidFill>
+                  <a:srgbClr val="3D4A40"/>
                 </a:solidFill>
                 <a:latin typeface="Arimo"/>
               </a:rPr>
-              <a:t>Коррекция гиперпигментации</a:t>
-            </a:r>
-          </a:p>
-        </p:txBody>
-      </p:sp>
-      <p:sp>
-        <p:nvSpPr>
-          <p:cNvPr id="5" name="TextBox 4"/>
+              <a:t>YM PROSKIN</a:t>
+            </a:r>
+          </a:p>
+        </p:txBody>
+      </p:sp>
+      <p:sp>
+        <p:nvSpPr>
+          <p:cNvPr id="7" name="TextBox 6"/>
           <p:cNvSpPr txBox="1"/>
           <p:nvPr/>
         </p:nvSpPr>
         <p:spPr>
           <a:xfrm>
-            <a:off x="357187" y="803671"/>
-            <a:ext cx="8429625" cy="267890"/>
+            <a:off x="8251031" y="4830960"/>
+            <a:ext cx="535781" cy="178593"/>
           </a:xfrm>
           <a:prstGeom prst="rect">
             <a:avLst/>
@@ -4423,11 +4852,11 @@
           </a:bodyPr>
           <a:lstStyle/>
           <a:p>
-            <a:pPr algn="l">
-              <a:lnSpc>
-                <a:spcPct val="120000"/>
-              </a:lnSpc>
-              <a:defRPr sz="1500" b="0" i="0">
+            <a:pPr algn="r">
+              <a:lnSpc>
+                <a:spcPct val="120000"/>
+              </a:lnSpc>
+              <a:defRPr sz="1100" b="0" i="0">
                 <a:solidFill>
                   <a:srgbClr val="6D8470"/>
                 </a:solidFill>
@@ -4435,27 +4864,27 @@
               </a:defRPr>
             </a:pPr>
             <a:r>
-              <a:rPr sz="1500" b="0" i="0">
+              <a:rPr sz="1100" b="0" i="0">
                 <a:solidFill>
                   <a:srgbClr val="6D8470"/>
                 </a:solidFill>
                 <a:latin typeface="Arimo"/>
               </a:rPr>
-              <a:t>Механизмы осветления кожи и клиническая эффективность при мелазме</a:t>
-            </a:r>
-          </a:p>
-        </p:txBody>
-      </p:sp>
-      <p:sp>
-        <p:nvSpPr>
-          <p:cNvPr id="6" name="TextBox 5"/>
+              <a:t>5</a:t>
+            </a:r>
+          </a:p>
+        </p:txBody>
+      </p:sp>
+      <p:sp>
+        <p:nvSpPr>
+          <p:cNvPr id="8" name="TextBox 7"/>
           <p:cNvSpPr txBox="1"/>
           <p:nvPr/>
         </p:nvSpPr>
         <p:spPr>
           <a:xfrm>
-            <a:off x="357187" y="1339453"/>
-            <a:ext cx="4572000" cy="2926080"/>
+            <a:off x="357187" y="357187"/>
+            <a:ext cx="8429625" cy="401835"/>
           </a:xfrm>
           <a:prstGeom prst="rect">
             <a:avLst/>
@@ -4472,6 +4901,96 @@
               <a:lnSpc>
                 <a:spcPct val="120000"/>
               </a:lnSpc>
+              <a:defRPr sz="2600" b="1" i="0">
+                <a:solidFill>
+                  <a:srgbClr val="2C3440"/>
+                </a:solidFill>
+                <a:latin typeface="Arimo"/>
+              </a:defRPr>
+            </a:pPr>
+            <a:r>
+              <a:rPr sz="2600" b="1" i="0">
+                <a:solidFill>
+                  <a:srgbClr val="2C3440"/>
+                </a:solidFill>
+                <a:latin typeface="Arimo"/>
+              </a:rPr>
+              <a:t>Коррекция гиперпигментации</a:t>
+            </a:r>
+          </a:p>
+        </p:txBody>
+      </p:sp>
+      <p:sp>
+        <p:nvSpPr>
+          <p:cNvPr id="9" name="TextBox 8"/>
+          <p:cNvSpPr txBox="1"/>
+          <p:nvPr/>
+        </p:nvSpPr>
+        <p:spPr>
+          <a:xfrm>
+            <a:off x="357187" y="803671"/>
+            <a:ext cx="8429625" cy="267890"/>
+          </a:xfrm>
+          <a:prstGeom prst="rect">
+            <a:avLst/>
+          </a:prstGeom>
+          <a:noFill/>
+        </p:spPr>
+        <p:txBody>
+          <a:bodyPr wrap="square" tIns="0" bIns="0" lIns="0" rIns="0">
+            <a:spAutoFit/>
+          </a:bodyPr>
+          <a:lstStyle/>
+          <a:p>
+            <a:pPr algn="l">
+              <a:lnSpc>
+                <a:spcPct val="120000"/>
+              </a:lnSpc>
+              <a:defRPr sz="1500" b="0" i="0">
+                <a:solidFill>
+                  <a:srgbClr val="6D8470"/>
+                </a:solidFill>
+                <a:latin typeface="Arimo"/>
+              </a:defRPr>
+            </a:pPr>
+            <a:r>
+              <a:rPr sz="1500" b="0" i="0">
+                <a:solidFill>
+                  <a:srgbClr val="6D8470"/>
+                </a:solidFill>
+                <a:latin typeface="Arimo"/>
+              </a:rPr>
+              <a:t>Механизмы осветления кожи и клиническая эффективность при мелазме</a:t>
+            </a:r>
+          </a:p>
+        </p:txBody>
+      </p:sp>
+      <p:sp>
+        <p:nvSpPr>
+          <p:cNvPr id="10" name="TextBox 9"/>
+          <p:cNvSpPr txBox="1"/>
+          <p:nvPr/>
+        </p:nvSpPr>
+        <p:spPr>
+          <a:xfrm>
+            <a:off x="357187" y="1339453"/>
+            <a:ext cx="4572000" cy="2926080"/>
+          </a:xfrm>
+          <a:prstGeom prst="rect">
+            <a:avLst/>
+          </a:prstGeom>
+          <a:noFill/>
+        </p:spPr>
+        <p:txBody>
+          <a:bodyPr wrap="square" tIns="0" bIns="0" lIns="0" rIns="0">
+            <a:spAutoFit/>
+          </a:bodyPr>
+          <a:lstStyle/>
+          <a:p>
+            <a:pPr algn="l">
+              <a:lnSpc>
+                <a:spcPct val="120000"/>
+              </a:lnSpc>
               <a:defRPr sz="1500" b="0" i="0">
                 <a:solidFill>
                   <a:srgbClr val="3D4A40"/>
@@ -4563,14 +5082,14 @@
       </p:sp>
       <p:pic>
         <p:nvPicPr>
-          <p:cNvPr id="7" name="Picture 6" descr="melanosome_transfer.png"/>
+          <p:cNvPr id="11" name="Picture 10" descr="melanosome_transfer.png"/>
           <p:cNvPicPr>
             <a:picLocks noChangeAspect="1"/>
           </p:cNvPicPr>
           <p:nvPr/>
         </p:nvPicPr>
         <p:blipFill>
-          <a:blip r:embed="rId2"/>
+          <a:blip r:embed="rId3"/>
           <a:stretch>
             <a:fillRect/>
           </a:stretch>
@@ -4619,7 +5138,7 @@
         </p:nvSpPr>
         <p:spPr>
           <a:xfrm>
-            <a:off x="357187" y="4643437"/>
+            <a:off x="357187" y="4464843"/>
             <a:ext cx="4572000" cy="274320"/>
           </a:xfrm>
           <a:prstGeom prst="rect">
@@ -4664,7 +5183,7 @@
         </p:nvSpPr>
         <p:spPr>
           <a:xfrm>
-            <a:off x="5029200" y="4643437"/>
+            <a:off x="5029200" y="4464843"/>
             <a:ext cx="3749039" cy="274320"/>
           </a:xfrm>
           <a:prstGeom prst="rect">
@@ -4703,14 +5222,81 @@
       </p:sp>
       <p:sp>
         <p:nvSpPr>
-          <p:cNvPr id="4" name="TextBox 3"/>
+          <p:cNvPr id="4" name="Rectangle 3"/>
+          <p:cNvSpPr/>
+          <p:nvPr/>
+        </p:nvSpPr>
+        <p:spPr>
+          <a:xfrm>
+            <a:off x="357187" y="4732734"/>
+            <a:ext cx="8429625" cy="8929"/>
+          </a:xfrm>
+          <a:prstGeom prst="rect">
+            <a:avLst/>
+          </a:prstGeom>
+          <a:solidFill>
+            <a:srgbClr val="D7E0CE"/>
+          </a:solidFill>
+          <a:ln>
+            <a:noFill/>
+          </a:ln>
+        </p:spPr>
+        <p:style>
+          <a:lnRef idx="1">
+            <a:schemeClr val="accent1"/>
+          </a:lnRef>
+          <a:fillRef idx="3">
+            <a:schemeClr val="accent1"/>
+          </a:fillRef>
+          <a:effectRef idx="2">
+            <a:schemeClr val="accent1"/>
+          </a:effectRef>
+          <a:fontRef idx="minor">
+            <a:schemeClr val="lt1"/>
+          </a:fontRef>
+        </p:style>
+        <p:txBody>
+          <a:bodyPr rtlCol="0" anchor="ctr"/>
+          <a:lstStyle/>
+          <a:p>
+            <a:pPr algn="ctr"/>
+          </a:p>
+        </p:txBody>
+      </p:sp>
+      <p:pic>
+        <p:nvPicPr>
+          <p:cNvPr id="5" name="Picture 4" descr="mark_6D8470.png"/>
+          <p:cNvPicPr>
+            <a:picLocks noChangeAspect="1"/>
+          </p:cNvPicPr>
+          <p:nvPr/>
+        </p:nvPicPr>
+        <p:blipFill>
+          <a:blip r:embed="rId2"/>
+          <a:stretch>
+            <a:fillRect/>
+          </a:stretch>
+        </p:blipFill>
+        <p:spPr>
+          <a:xfrm>
+            <a:off x="357187" y="4848820"/>
+            <a:ext cx="178593" cy="178593"/>
+          </a:xfrm>
+          <a:prstGeom prst="rect">
+            <a:avLst/>
+          </a:prstGeom>
+        </p:spPr>
+      </p:pic>
+      <p:sp>
+        <p:nvSpPr>
+          <p:cNvPr id="6" name="TextBox 5"/>
           <p:cNvSpPr txBox="1"/>
           <p:nvPr/>
         </p:nvSpPr>
         <p:spPr>
           <a:xfrm>
-            <a:off x="357187" y="357187"/>
-            <a:ext cx="8429625" cy="401835"/>
+            <a:off x="607218" y="4830960"/>
+            <a:ext cx="1785937" cy="178593"/>
           </a:xfrm>
           <a:prstGeom prst="rect">
             <a:avLst/>
@@ -4727,35 +5313,35 @@
               <a:lnSpc>
                 <a:spcPct val="120000"/>
               </a:lnSpc>
-              <a:defRPr sz="2600" b="1" i="0">
-                <a:solidFill>
-                  <a:srgbClr val="2C3440"/>
-                </a:solidFill>
-                <a:latin typeface="Arimo"/>
-              </a:defRPr>
-            </a:pPr>
-            <a:r>
-              <a:rPr sz="2600" b="1" i="0">
-                <a:solidFill>
-                  <a:srgbClr val="2C3440"/>
+              <a:defRPr sz="1100" b="1" i="0">
+                <a:solidFill>
+                  <a:srgbClr val="3D4A40"/>
+                </a:solidFill>
+                <a:latin typeface="Arimo"/>
+              </a:defRPr>
+            </a:pPr>
+            <a:r>
+              <a:rPr sz="1100" b="1" i="0">
+                <a:solidFill>
+                  <a:srgbClr val="3D4A40"/>
                 </a:solidFill>
                 <a:latin typeface="Arimo"/>
               </a:rPr>
-              <a:t>Коррекция возрастных изменений</a:t>
-            </a:r>
-          </a:p>
-        </p:txBody>
-      </p:sp>
-      <p:sp>
-        <p:nvSpPr>
-          <p:cNvPr id="5" name="TextBox 4"/>
+              <a:t>YM PROSKIN</a:t>
+            </a:r>
+          </a:p>
+        </p:txBody>
+      </p:sp>
+      <p:sp>
+        <p:nvSpPr>
+          <p:cNvPr id="7" name="TextBox 6"/>
           <p:cNvSpPr txBox="1"/>
           <p:nvPr/>
         </p:nvSpPr>
         <p:spPr>
           <a:xfrm>
-            <a:off x="357187" y="803671"/>
-            <a:ext cx="8429625" cy="267890"/>
+            <a:off x="8251031" y="4830960"/>
+            <a:ext cx="535781" cy="178593"/>
           </a:xfrm>
           <a:prstGeom prst="rect">
             <a:avLst/>
@@ -4768,11 +5354,11 @@
           </a:bodyPr>
           <a:lstStyle/>
           <a:p>
-            <a:pPr algn="l">
-              <a:lnSpc>
-                <a:spcPct val="120000"/>
-              </a:lnSpc>
-              <a:defRPr sz="1500" b="0" i="0">
+            <a:pPr algn="r">
+              <a:lnSpc>
+                <a:spcPct val="120000"/>
+              </a:lnSpc>
+              <a:defRPr sz="1100" b="0" i="0">
                 <a:solidFill>
                   <a:srgbClr val="6D8470"/>
                 </a:solidFill>
@@ -4780,27 +5366,27 @@
               </a:defRPr>
             </a:pPr>
             <a:r>
-              <a:rPr sz="1500" b="0" i="0">
+              <a:rPr sz="1100" b="0" i="0">
                 <a:solidFill>
                   <a:srgbClr val="6D8470"/>
                 </a:solidFill>
                 <a:latin typeface="Arimo"/>
               </a:rPr>
-              <a:t>Многофакторное омолаживающее действие топического 5% ниацинамида</a:t>
-            </a:r>
-          </a:p>
-        </p:txBody>
-      </p:sp>
-      <p:sp>
-        <p:nvSpPr>
-          <p:cNvPr id="6" name="TextBox 5"/>
+              <a:t>6</a:t>
+            </a:r>
+          </a:p>
+        </p:txBody>
+      </p:sp>
+      <p:sp>
+        <p:nvSpPr>
+          <p:cNvPr id="8" name="TextBox 7"/>
           <p:cNvSpPr txBox="1"/>
           <p:nvPr/>
         </p:nvSpPr>
         <p:spPr>
           <a:xfrm>
-            <a:off x="357187" y="1339453"/>
-            <a:ext cx="4572000" cy="2926080"/>
+            <a:off x="357187" y="357187"/>
+            <a:ext cx="8429625" cy="401835"/>
           </a:xfrm>
           <a:prstGeom prst="rect">
             <a:avLst/>
@@ -4817,6 +5403,96 @@
               <a:lnSpc>
                 <a:spcPct val="120000"/>
               </a:lnSpc>
+              <a:defRPr sz="2600" b="1" i="0">
+                <a:solidFill>
+                  <a:srgbClr val="2C3440"/>
+                </a:solidFill>
+                <a:latin typeface="Arimo"/>
+              </a:defRPr>
+            </a:pPr>
+            <a:r>
+              <a:rPr sz="2600" b="1" i="0">
+                <a:solidFill>
+                  <a:srgbClr val="2C3440"/>
+                </a:solidFill>
+                <a:latin typeface="Arimo"/>
+              </a:rPr>
+              <a:t>Коррекция возрастных изменений</a:t>
+            </a:r>
+          </a:p>
+        </p:txBody>
+      </p:sp>
+      <p:sp>
+        <p:nvSpPr>
+          <p:cNvPr id="9" name="TextBox 8"/>
+          <p:cNvSpPr txBox="1"/>
+          <p:nvPr/>
+        </p:nvSpPr>
+        <p:spPr>
+          <a:xfrm>
+            <a:off x="357187" y="803671"/>
+            <a:ext cx="8429625" cy="267890"/>
+          </a:xfrm>
+          <a:prstGeom prst="rect">
+            <a:avLst/>
+          </a:prstGeom>
+          <a:noFill/>
+        </p:spPr>
+        <p:txBody>
+          <a:bodyPr wrap="square" tIns="0" bIns="0" lIns="0" rIns="0">
+            <a:spAutoFit/>
+          </a:bodyPr>
+          <a:lstStyle/>
+          <a:p>
+            <a:pPr algn="l">
+              <a:lnSpc>
+                <a:spcPct val="120000"/>
+              </a:lnSpc>
+              <a:defRPr sz="1500" b="0" i="0">
+                <a:solidFill>
+                  <a:srgbClr val="6D8470"/>
+                </a:solidFill>
+                <a:latin typeface="Arimo"/>
+              </a:defRPr>
+            </a:pPr>
+            <a:r>
+              <a:rPr sz="1500" b="0" i="0">
+                <a:solidFill>
+                  <a:srgbClr val="6D8470"/>
+                </a:solidFill>
+                <a:latin typeface="Arimo"/>
+              </a:rPr>
+              <a:t>Многофакторное омолаживающее действие топического 5% ниацинамида</a:t>
+            </a:r>
+          </a:p>
+        </p:txBody>
+      </p:sp>
+      <p:sp>
+        <p:nvSpPr>
+          <p:cNvPr id="10" name="TextBox 9"/>
+          <p:cNvSpPr txBox="1"/>
+          <p:nvPr/>
+        </p:nvSpPr>
+        <p:spPr>
+          <a:xfrm>
+            <a:off x="357187" y="1339453"/>
+            <a:ext cx="4572000" cy="2926080"/>
+          </a:xfrm>
+          <a:prstGeom prst="rect">
+            <a:avLst/>
+          </a:prstGeom>
+          <a:noFill/>
+        </p:spPr>
+        <p:txBody>
+          <a:bodyPr wrap="square" tIns="0" bIns="0" lIns="0" rIns="0">
+            <a:spAutoFit/>
+          </a:bodyPr>
+          <a:lstStyle/>
+          <a:p>
+            <a:pPr algn="l">
+              <a:lnSpc>
+                <a:spcPct val="120000"/>
+              </a:lnSpc>
               <a:defRPr sz="1500" b="0" i="0">
                 <a:solidFill>
                   <a:srgbClr val="3D4A40"/>
@@ -4908,14 +5584,14 @@
       </p:sp>
       <p:pic>
         <p:nvPicPr>
-          <p:cNvPr id="7" name="Picture 6" descr="skin_layers_turnover.png"/>
+          <p:cNvPr id="11" name="Picture 10" descr="skin_layers_turnover.png"/>
           <p:cNvPicPr>
             <a:picLocks noChangeAspect="1"/>
           </p:cNvPicPr>
           <p:nvPr/>
         </p:nvPicPr>
         <p:blipFill>
-          <a:blip r:embed="rId2"/>
+          <a:blip r:embed="rId3"/>
           <a:stretch>
             <a:fillRect/>
           </a:stretch>
@@ -4964,7 +5640,7 @@
         </p:nvSpPr>
         <p:spPr>
           <a:xfrm>
-            <a:off x="357187" y="4643437"/>
+            <a:off x="357187" y="4464843"/>
             <a:ext cx="4572000" cy="274320"/>
           </a:xfrm>
           <a:prstGeom prst="rect">
@@ -5009,7 +5685,7 @@
         </p:nvSpPr>
         <p:spPr>
           <a:xfrm>
-            <a:off x="5029200" y="4643437"/>
+            <a:off x="5029200" y="4464843"/>
             <a:ext cx="3749039" cy="274320"/>
           </a:xfrm>
           <a:prstGeom prst="rect">
@@ -5048,115 +5724,23 @@
       </p:sp>
       <p:sp>
         <p:nvSpPr>
-          <p:cNvPr id="4" name="TextBox 3"/>
-          <p:cNvSpPr txBox="1"/>
-          <p:nvPr/>
-        </p:nvSpPr>
-        <p:spPr>
-          <a:xfrm>
-            <a:off x="357187" y="357187"/>
-            <a:ext cx="8429625" cy="401835"/>
-          </a:xfrm>
-          <a:prstGeom prst="rect">
-            <a:avLst/>
-          </a:prstGeom>
-          <a:noFill/>
-        </p:spPr>
-        <p:txBody>
-          <a:bodyPr wrap="square" tIns="0" bIns="0" lIns="0" rIns="0">
-            <a:spAutoFit/>
-          </a:bodyPr>
-          <a:lstStyle/>
-          <a:p>
-            <a:pPr algn="l">
-              <a:lnSpc>
-                <a:spcPct val="120000"/>
-              </a:lnSpc>
-              <a:defRPr sz="2600" b="1" i="0">
-                <a:solidFill>
-                  <a:srgbClr val="2C3440"/>
-                </a:solidFill>
-                <a:latin typeface="Arimo"/>
-              </a:defRPr>
-            </a:pPr>
-            <a:r>
-              <a:rPr sz="2600" b="1" i="0">
-                <a:solidFill>
-                  <a:srgbClr val="2C3440"/>
-                </a:solidFill>
-                <a:latin typeface="Arimo"/>
-              </a:rPr>
-              <a:t>Клиническая Переносимость</a:t>
-            </a:r>
-          </a:p>
-        </p:txBody>
-      </p:sp>
-      <p:sp>
-        <p:nvSpPr>
-          <p:cNvPr id="5" name="TextBox 4"/>
-          <p:cNvSpPr txBox="1"/>
-          <p:nvPr/>
-        </p:nvSpPr>
-        <p:spPr>
-          <a:xfrm>
-            <a:off x="357187" y="803671"/>
-            <a:ext cx="8429625" cy="267890"/>
-          </a:xfrm>
-          <a:prstGeom prst="rect">
-            <a:avLst/>
-          </a:prstGeom>
-          <a:noFill/>
-        </p:spPr>
-        <p:txBody>
-          <a:bodyPr wrap="square" tIns="0" bIns="0" lIns="0" rIns="0">
-            <a:spAutoFit/>
-          </a:bodyPr>
-          <a:lstStyle/>
-          <a:p>
-            <a:pPr algn="l">
-              <a:lnSpc>
-                <a:spcPct val="120000"/>
-              </a:lnSpc>
-              <a:defRPr sz="1500" b="0" i="0">
-                <a:solidFill>
-                  <a:srgbClr val="6D8470"/>
-                </a:solidFill>
-                <a:latin typeface="Arimo"/>
-              </a:defRPr>
-            </a:pPr>
-            <a:r>
-              <a:rPr sz="1500" b="0" i="0">
-                <a:solidFill>
-                  <a:srgbClr val="6D8470"/>
-                </a:solidFill>
-                <a:latin typeface="Arimo"/>
-              </a:rPr>
-              <a:t>Мягкий терапевтический профиль и применение при чувствительности кожи</a:t>
-            </a:r>
-          </a:p>
-        </p:txBody>
-      </p:sp>
-      <p:sp>
-        <p:nvSpPr>
-          <p:cNvPr id="6" name="Rounded Rectangle 5"/>
+          <p:cNvPr id="4" name="Rectangle 3"/>
           <p:cNvSpPr/>
           <p:nvPr/>
         </p:nvSpPr>
         <p:spPr>
           <a:xfrm>
-            <a:off x="357187" y="1339453"/>
-            <a:ext cx="8430768" cy="2496312"/>
-          </a:xfrm>
-          <a:prstGeom prst="roundRect">
+            <a:off x="357187" y="4732734"/>
+            <a:ext cx="8429625" cy="8929"/>
+          </a:xfrm>
+          <a:prstGeom prst="rect">
             <a:avLst/>
           </a:prstGeom>
           <a:solidFill>
-            <a:srgbClr val="E6D2CA"/>
+            <a:srgbClr val="D7E0CE"/>
           </a:solidFill>
-          <a:ln w="25400">
-            <a:solidFill>
-              <a:srgbClr val="9E6A5A"/>
-            </a:solidFill>
+          <a:ln>
+            <a:noFill/>
           </a:ln>
         </p:spPr>
         <p:style>
@@ -5181,16 +5765,40 @@
           </a:p>
         </p:txBody>
       </p:sp>
-      <p:sp>
-        <p:nvSpPr>
-          <p:cNvPr id="7" name="TextBox 6"/>
+      <p:pic>
+        <p:nvPicPr>
+          <p:cNvPr id="5" name="Picture 4" descr="mark_6D8470.png"/>
+          <p:cNvPicPr>
+            <a:picLocks noChangeAspect="1"/>
+          </p:cNvPicPr>
+          <p:nvPr/>
+        </p:nvPicPr>
+        <p:blipFill>
+          <a:blip r:embed="rId2"/>
+          <a:stretch>
+            <a:fillRect/>
+          </a:stretch>
+        </p:blipFill>
+        <p:spPr>
+          <a:xfrm>
+            <a:off x="357187" y="4848820"/>
+            <a:ext cx="178593" cy="178593"/>
+          </a:xfrm>
+          <a:prstGeom prst="rect">
+            <a:avLst/>
+          </a:prstGeom>
+        </p:spPr>
+      </p:pic>
+      <p:sp>
+        <p:nvSpPr>
+          <p:cNvPr id="6" name="TextBox 5"/>
           <p:cNvSpPr txBox="1"/>
           <p:nvPr/>
         </p:nvSpPr>
         <p:spPr>
           <a:xfrm>
-            <a:off x="640080" y="2009179"/>
-            <a:ext cx="731520" cy="731520"/>
+            <a:off x="607218" y="4830960"/>
+            <a:ext cx="1785937" cy="178593"/>
           </a:xfrm>
           <a:prstGeom prst="rect">
             <a:avLst/>
@@ -5203,39 +5811,39 @@
           </a:bodyPr>
           <a:lstStyle/>
           <a:p>
-            <a:pPr algn="ctr">
-              <a:lnSpc>
-                <a:spcPct val="120000"/>
-              </a:lnSpc>
-              <a:defRPr sz="4800" b="0" i="0">
-                <a:solidFill>
-                  <a:srgbClr val="9E6A5A"/>
-                </a:solidFill>
-                <a:latin typeface="Arimo"/>
-              </a:defRPr>
-            </a:pPr>
-            <a:r>
-              <a:rPr sz="4800" b="0" i="0">
-                <a:solidFill>
-                  <a:srgbClr val="9E6A5A"/>
+            <a:pPr algn="l">
+              <a:lnSpc>
+                <a:spcPct val="120000"/>
+              </a:lnSpc>
+              <a:defRPr sz="1100" b="1" i="0">
+                <a:solidFill>
+                  <a:srgbClr val="3D4A40"/>
+                </a:solidFill>
+                <a:latin typeface="Arimo"/>
+              </a:defRPr>
+            </a:pPr>
+            <a:r>
+              <a:rPr sz="1100" b="1" i="0">
+                <a:solidFill>
+                  <a:srgbClr val="3D4A40"/>
                 </a:solidFill>
                 <a:latin typeface="Arimo"/>
               </a:rPr>
-              <a:t>⚠️</a:t>
-            </a:r>
-          </a:p>
-        </p:txBody>
-      </p:sp>
-      <p:sp>
-        <p:nvSpPr>
-          <p:cNvPr id="8" name="TextBox 7"/>
+              <a:t>YM PROSKIN</a:t>
+            </a:r>
+          </a:p>
+        </p:txBody>
+      </p:sp>
+      <p:sp>
+        <p:nvSpPr>
+          <p:cNvPr id="7" name="TextBox 6"/>
           <p:cNvSpPr txBox="1"/>
           <p:nvPr/>
         </p:nvSpPr>
         <p:spPr>
           <a:xfrm>
-            <a:off x="1517904" y="1607343"/>
-            <a:ext cx="6858000" cy="365760"/>
+            <a:off x="8251031" y="4830960"/>
+            <a:ext cx="535781" cy="178593"/>
           </a:xfrm>
           <a:prstGeom prst="rect">
             <a:avLst/>
@@ -5248,6 +5856,231 @@
           </a:bodyPr>
           <a:lstStyle/>
           <a:p>
+            <a:pPr algn="r">
+              <a:lnSpc>
+                <a:spcPct val="120000"/>
+              </a:lnSpc>
+              <a:defRPr sz="1100" b="0" i="0">
+                <a:solidFill>
+                  <a:srgbClr val="6D8470"/>
+                </a:solidFill>
+                <a:latin typeface="Arimo"/>
+              </a:defRPr>
+            </a:pPr>
+            <a:r>
+              <a:rPr sz="1100" b="0" i="0">
+                <a:solidFill>
+                  <a:srgbClr val="6D8470"/>
+                </a:solidFill>
+                <a:latin typeface="Arimo"/>
+              </a:rPr>
+              <a:t>7</a:t>
+            </a:r>
+          </a:p>
+        </p:txBody>
+      </p:sp>
+      <p:sp>
+        <p:nvSpPr>
+          <p:cNvPr id="8" name="TextBox 7"/>
+          <p:cNvSpPr txBox="1"/>
+          <p:nvPr/>
+        </p:nvSpPr>
+        <p:spPr>
+          <a:xfrm>
+            <a:off x="357187" y="357187"/>
+            <a:ext cx="8429625" cy="401835"/>
+          </a:xfrm>
+          <a:prstGeom prst="rect">
+            <a:avLst/>
+          </a:prstGeom>
+          <a:noFill/>
+        </p:spPr>
+        <p:txBody>
+          <a:bodyPr wrap="square" tIns="0" bIns="0" lIns="0" rIns="0">
+            <a:spAutoFit/>
+          </a:bodyPr>
+          <a:lstStyle/>
+          <a:p>
+            <a:pPr algn="l">
+              <a:lnSpc>
+                <a:spcPct val="120000"/>
+              </a:lnSpc>
+              <a:defRPr sz="2600" b="1" i="0">
+                <a:solidFill>
+                  <a:srgbClr val="2C3440"/>
+                </a:solidFill>
+                <a:latin typeface="Arimo"/>
+              </a:defRPr>
+            </a:pPr>
+            <a:r>
+              <a:rPr sz="2600" b="1" i="0">
+                <a:solidFill>
+                  <a:srgbClr val="2C3440"/>
+                </a:solidFill>
+                <a:latin typeface="Arimo"/>
+              </a:rPr>
+              <a:t>Клиническая Переносимость</a:t>
+            </a:r>
+          </a:p>
+        </p:txBody>
+      </p:sp>
+      <p:sp>
+        <p:nvSpPr>
+          <p:cNvPr id="9" name="TextBox 8"/>
+          <p:cNvSpPr txBox="1"/>
+          <p:nvPr/>
+        </p:nvSpPr>
+        <p:spPr>
+          <a:xfrm>
+            <a:off x="357187" y="803671"/>
+            <a:ext cx="8429625" cy="267890"/>
+          </a:xfrm>
+          <a:prstGeom prst="rect">
+            <a:avLst/>
+          </a:prstGeom>
+          <a:noFill/>
+        </p:spPr>
+        <p:txBody>
+          <a:bodyPr wrap="square" tIns="0" bIns="0" lIns="0" rIns="0">
+            <a:spAutoFit/>
+          </a:bodyPr>
+          <a:lstStyle/>
+          <a:p>
+            <a:pPr algn="l">
+              <a:lnSpc>
+                <a:spcPct val="120000"/>
+              </a:lnSpc>
+              <a:defRPr sz="1500" b="0" i="0">
+                <a:solidFill>
+                  <a:srgbClr val="6D8470"/>
+                </a:solidFill>
+                <a:latin typeface="Arimo"/>
+              </a:defRPr>
+            </a:pPr>
+            <a:r>
+              <a:rPr sz="1500" b="0" i="0">
+                <a:solidFill>
+                  <a:srgbClr val="6D8470"/>
+                </a:solidFill>
+                <a:latin typeface="Arimo"/>
+              </a:rPr>
+              <a:t>Мягкий терапевтический профиль и применение при чувствительности кожи</a:t>
+            </a:r>
+          </a:p>
+        </p:txBody>
+      </p:sp>
+      <p:sp>
+        <p:nvSpPr>
+          <p:cNvPr id="10" name="Rounded Rectangle 9"/>
+          <p:cNvSpPr/>
+          <p:nvPr/>
+        </p:nvSpPr>
+        <p:spPr>
+          <a:xfrm>
+            <a:off x="357187" y="1339453"/>
+            <a:ext cx="8430768" cy="2496312"/>
+          </a:xfrm>
+          <a:prstGeom prst="roundRect">
+            <a:avLst/>
+          </a:prstGeom>
+          <a:solidFill>
+            <a:srgbClr val="E6D2CA"/>
+          </a:solidFill>
+          <a:ln w="25400">
+            <a:solidFill>
+              <a:srgbClr val="9E6A5A"/>
+            </a:solidFill>
+          </a:ln>
+        </p:spPr>
+        <p:style>
+          <a:lnRef idx="1">
+            <a:schemeClr val="accent1"/>
+          </a:lnRef>
+          <a:fillRef idx="3">
+            <a:schemeClr val="accent1"/>
+          </a:fillRef>
+          <a:effectRef idx="2">
+            <a:schemeClr val="accent1"/>
+          </a:effectRef>
+          <a:fontRef idx="minor">
+            <a:schemeClr val="lt1"/>
+          </a:fontRef>
+        </p:style>
+        <p:txBody>
+          <a:bodyPr rtlCol="0" anchor="ctr"/>
+          <a:lstStyle/>
+          <a:p>
+            <a:pPr algn="ctr"/>
+          </a:p>
+        </p:txBody>
+      </p:sp>
+      <p:sp>
+        <p:nvSpPr>
+          <p:cNvPr id="11" name="TextBox 10"/>
+          <p:cNvSpPr txBox="1"/>
+          <p:nvPr/>
+        </p:nvSpPr>
+        <p:spPr>
+          <a:xfrm>
+            <a:off x="640080" y="2009179"/>
+            <a:ext cx="731520" cy="731520"/>
+          </a:xfrm>
+          <a:prstGeom prst="rect">
+            <a:avLst/>
+          </a:prstGeom>
+          <a:noFill/>
+        </p:spPr>
+        <p:txBody>
+          <a:bodyPr wrap="square" tIns="0" bIns="0" lIns="0" rIns="0">
+            <a:spAutoFit/>
+          </a:bodyPr>
+          <a:lstStyle/>
+          <a:p>
+            <a:pPr algn="ctr">
+              <a:lnSpc>
+                <a:spcPct val="120000"/>
+              </a:lnSpc>
+              <a:defRPr sz="4800" b="0" i="0">
+                <a:solidFill>
+                  <a:srgbClr val="9E6A5A"/>
+                </a:solidFill>
+                <a:latin typeface="Arimo"/>
+              </a:defRPr>
+            </a:pPr>
+            <a:r>
+              <a:rPr sz="4800" b="0" i="0">
+                <a:solidFill>
+                  <a:srgbClr val="9E6A5A"/>
+                </a:solidFill>
+                <a:latin typeface="Arimo"/>
+              </a:rPr>
+              <a:t>⚠️</a:t>
+            </a:r>
+          </a:p>
+        </p:txBody>
+      </p:sp>
+      <p:sp>
+        <p:nvSpPr>
+          <p:cNvPr id="12" name="TextBox 11"/>
+          <p:cNvSpPr txBox="1"/>
+          <p:nvPr/>
+        </p:nvSpPr>
+        <p:spPr>
+          <a:xfrm>
+            <a:off x="1517904" y="1607343"/>
+            <a:ext cx="6858000" cy="365760"/>
+          </a:xfrm>
+          <a:prstGeom prst="rect">
+            <a:avLst/>
+          </a:prstGeom>
+          <a:noFill/>
+        </p:spPr>
+        <p:txBody>
+          <a:bodyPr wrap="square" tIns="0" bIns="0" lIns="0" rIns="0">
+            <a:spAutoFit/>
+          </a:bodyPr>
+          <a:lstStyle/>
+          <a:p>
             <a:pPr algn="l">
               <a:lnSpc>
                 <a:spcPct val="120000"/>
@@ -5273,7 +6106,7 @@
       </p:sp>
       <p:sp>
         <p:nvSpPr>
-          <p:cNvPr id="9" name="TextBox 8"/>
+          <p:cNvPr id="13" name="TextBox 12"/>
           <p:cNvSpPr txBox="1"/>
           <p:nvPr/>
         </p:nvSpPr>
@@ -5350,7 +6183,7 @@
         </p:nvSpPr>
         <p:spPr>
           <a:xfrm>
-            <a:off x="357187" y="4643437"/>
+            <a:off x="357187" y="4464843"/>
             <a:ext cx="4572000" cy="274320"/>
           </a:xfrm>
           <a:prstGeom prst="rect">
@@ -5395,7 +6228,7 @@
         </p:nvSpPr>
         <p:spPr>
           <a:xfrm>
-            <a:off x="5029200" y="4643437"/>
+            <a:off x="5029200" y="4464843"/>
             <a:ext cx="3749039" cy="274320"/>
           </a:xfrm>
           <a:prstGeom prst="rect">
@@ -5434,115 +6267,23 @@
       </p:sp>
       <p:sp>
         <p:nvSpPr>
-          <p:cNvPr id="4" name="TextBox 3"/>
-          <p:cNvSpPr txBox="1"/>
-          <p:nvPr/>
-        </p:nvSpPr>
-        <p:spPr>
-          <a:xfrm>
-            <a:off x="357187" y="357187"/>
-            <a:ext cx="8429625" cy="401835"/>
-          </a:xfrm>
-          <a:prstGeom prst="rect">
-            <a:avLst/>
-          </a:prstGeom>
-          <a:noFill/>
-        </p:spPr>
-        <p:txBody>
-          <a:bodyPr wrap="square" tIns="0" bIns="0" lIns="0" rIns="0">
-            <a:spAutoFit/>
-          </a:bodyPr>
-          <a:lstStyle/>
-          <a:p>
-            <a:pPr algn="l">
-              <a:lnSpc>
-                <a:spcPct val="120000"/>
-              </a:lnSpc>
-              <a:defRPr sz="2600" b="1" i="0">
-                <a:solidFill>
-                  <a:srgbClr val="2C3440"/>
-                </a:solidFill>
-                <a:latin typeface="Arimo"/>
-              </a:defRPr>
-            </a:pPr>
-            <a:r>
-              <a:rPr sz="2600" b="1" i="0">
-                <a:solidFill>
-                  <a:srgbClr val="2C3440"/>
-                </a:solidFill>
-                <a:latin typeface="Arimo"/>
-              </a:rPr>
-              <a:t>Терапевтические выводы</a:t>
-            </a:r>
-          </a:p>
-        </p:txBody>
-      </p:sp>
-      <p:sp>
-        <p:nvSpPr>
-          <p:cNvPr id="5" name="TextBox 4"/>
-          <p:cNvSpPr txBox="1"/>
-          <p:nvPr/>
-        </p:nvSpPr>
-        <p:spPr>
-          <a:xfrm>
-            <a:off x="357187" y="803671"/>
-            <a:ext cx="8429625" cy="267890"/>
-          </a:xfrm>
-          <a:prstGeom prst="rect">
-            <a:avLst/>
-          </a:prstGeom>
-          <a:noFill/>
-        </p:spPr>
-        <p:txBody>
-          <a:bodyPr wrap="square" tIns="0" bIns="0" lIns="0" rIns="0">
-            <a:spAutoFit/>
-          </a:bodyPr>
-          <a:lstStyle/>
-          <a:p>
-            <a:pPr algn="l">
-              <a:lnSpc>
-                <a:spcPct val="120000"/>
-              </a:lnSpc>
-              <a:defRPr sz="1500" b="0" i="0">
-                <a:solidFill>
-                  <a:srgbClr val="6D8470"/>
-                </a:solidFill>
-                <a:latin typeface="Arimo"/>
-              </a:defRPr>
-            </a:pPr>
-            <a:r>
-              <a:rPr sz="1500" b="0" i="0">
-                <a:solidFill>
-                  <a:srgbClr val="6D8470"/>
-                </a:solidFill>
-                <a:latin typeface="Arimo"/>
-              </a:rPr>
-              <a:t>Резюме по клиническому применению ниацинамида</a:t>
-            </a:r>
-          </a:p>
-        </p:txBody>
-      </p:sp>
-      <p:sp>
-        <p:nvSpPr>
-          <p:cNvPr id="6" name="Rounded Rectangle 5"/>
+          <p:cNvPr id="4" name="Rectangle 3"/>
           <p:cNvSpPr/>
           <p:nvPr/>
         </p:nvSpPr>
         <p:spPr>
           <a:xfrm>
-            <a:off x="357187" y="1303734"/>
-            <a:ext cx="8430768" cy="2857500"/>
-          </a:xfrm>
-          <a:prstGeom prst="roundRect">
+            <a:off x="357187" y="4732734"/>
+            <a:ext cx="8429625" cy="8929"/>
+          </a:xfrm>
+          <a:prstGeom prst="rect">
             <a:avLst/>
           </a:prstGeom>
           <a:solidFill>
-            <a:srgbClr val="E6D2CA"/>
+            <a:srgbClr val="D7E0CE"/>
           </a:solidFill>
-          <a:ln w="12700">
-            <a:solidFill>
-              <a:srgbClr val="D7E0CE"/>
-            </a:solidFill>
+          <a:ln>
+            <a:noFill/>
           </a:ln>
         </p:spPr>
         <p:style>
@@ -5567,16 +6308,40 @@
           </a:p>
         </p:txBody>
       </p:sp>
-      <p:sp>
-        <p:nvSpPr>
-          <p:cNvPr id="7" name="TextBox 6"/>
+      <p:pic>
+        <p:nvPicPr>
+          <p:cNvPr id="5" name="Picture 4" descr="mark_6D8470.png"/>
+          <p:cNvPicPr>
+            <a:picLocks noChangeAspect="1"/>
+          </p:cNvPicPr>
+          <p:nvPr/>
+        </p:nvPicPr>
+        <p:blipFill>
+          <a:blip r:embed="rId2"/>
+          <a:stretch>
+            <a:fillRect/>
+          </a:stretch>
+        </p:blipFill>
+        <p:spPr>
+          <a:xfrm>
+            <a:off x="357187" y="4848820"/>
+            <a:ext cx="178593" cy="178593"/>
+          </a:xfrm>
+          <a:prstGeom prst="rect">
+            <a:avLst/>
+          </a:prstGeom>
+        </p:spPr>
+      </p:pic>
+      <p:sp>
+        <p:nvSpPr>
+          <p:cNvPr id="6" name="TextBox 5"/>
           <p:cNvSpPr txBox="1"/>
           <p:nvPr/>
         </p:nvSpPr>
         <p:spPr>
           <a:xfrm>
-            <a:off x="640080" y="1580554"/>
-            <a:ext cx="7863840" cy="2286000"/>
+            <a:off x="607218" y="4830960"/>
+            <a:ext cx="1785937" cy="178593"/>
           </a:xfrm>
           <a:prstGeom prst="rect">
             <a:avLst/>
@@ -5593,6 +6358,231 @@
               <a:lnSpc>
                 <a:spcPct val="120000"/>
               </a:lnSpc>
+              <a:defRPr sz="1100" b="1" i="0">
+                <a:solidFill>
+                  <a:srgbClr val="3D4A40"/>
+                </a:solidFill>
+                <a:latin typeface="Arimo"/>
+              </a:defRPr>
+            </a:pPr>
+            <a:r>
+              <a:rPr sz="1100" b="1" i="0">
+                <a:solidFill>
+                  <a:srgbClr val="3D4A40"/>
+                </a:solidFill>
+                <a:latin typeface="Arimo"/>
+              </a:rPr>
+              <a:t>YM PROSKIN</a:t>
+            </a:r>
+          </a:p>
+        </p:txBody>
+      </p:sp>
+      <p:sp>
+        <p:nvSpPr>
+          <p:cNvPr id="7" name="TextBox 6"/>
+          <p:cNvSpPr txBox="1"/>
+          <p:nvPr/>
+        </p:nvSpPr>
+        <p:spPr>
+          <a:xfrm>
+            <a:off x="8251031" y="4830960"/>
+            <a:ext cx="535781" cy="178593"/>
+          </a:xfrm>
+          <a:prstGeom prst="rect">
+            <a:avLst/>
+          </a:prstGeom>
+          <a:noFill/>
+        </p:spPr>
+        <p:txBody>
+          <a:bodyPr wrap="square" tIns="0" bIns="0" lIns="0" rIns="0">
+            <a:spAutoFit/>
+          </a:bodyPr>
+          <a:lstStyle/>
+          <a:p>
+            <a:pPr algn="r">
+              <a:lnSpc>
+                <a:spcPct val="120000"/>
+              </a:lnSpc>
+              <a:defRPr sz="1100" b="0" i="0">
+                <a:solidFill>
+                  <a:srgbClr val="6D8470"/>
+                </a:solidFill>
+                <a:latin typeface="Arimo"/>
+              </a:defRPr>
+            </a:pPr>
+            <a:r>
+              <a:rPr sz="1100" b="0" i="0">
+                <a:solidFill>
+                  <a:srgbClr val="6D8470"/>
+                </a:solidFill>
+                <a:latin typeface="Arimo"/>
+              </a:rPr>
+              <a:t>8</a:t>
+            </a:r>
+          </a:p>
+        </p:txBody>
+      </p:sp>
+      <p:sp>
+        <p:nvSpPr>
+          <p:cNvPr id="8" name="TextBox 7"/>
+          <p:cNvSpPr txBox="1"/>
+          <p:nvPr/>
+        </p:nvSpPr>
+        <p:spPr>
+          <a:xfrm>
+            <a:off x="357187" y="357187"/>
+            <a:ext cx="8429625" cy="401835"/>
+          </a:xfrm>
+          <a:prstGeom prst="rect">
+            <a:avLst/>
+          </a:prstGeom>
+          <a:noFill/>
+        </p:spPr>
+        <p:txBody>
+          <a:bodyPr wrap="square" tIns="0" bIns="0" lIns="0" rIns="0">
+            <a:spAutoFit/>
+          </a:bodyPr>
+          <a:lstStyle/>
+          <a:p>
+            <a:pPr algn="l">
+              <a:lnSpc>
+                <a:spcPct val="120000"/>
+              </a:lnSpc>
+              <a:defRPr sz="2600" b="1" i="0">
+                <a:solidFill>
+                  <a:srgbClr val="2C3440"/>
+                </a:solidFill>
+                <a:latin typeface="Arimo"/>
+              </a:defRPr>
+            </a:pPr>
+            <a:r>
+              <a:rPr sz="2600" b="1" i="0">
+                <a:solidFill>
+                  <a:srgbClr val="2C3440"/>
+                </a:solidFill>
+                <a:latin typeface="Arimo"/>
+              </a:rPr>
+              <a:t>Терапевтические выводы</a:t>
+            </a:r>
+          </a:p>
+        </p:txBody>
+      </p:sp>
+      <p:sp>
+        <p:nvSpPr>
+          <p:cNvPr id="9" name="TextBox 8"/>
+          <p:cNvSpPr txBox="1"/>
+          <p:nvPr/>
+        </p:nvSpPr>
+        <p:spPr>
+          <a:xfrm>
+            <a:off x="357187" y="803671"/>
+            <a:ext cx="8429625" cy="267890"/>
+          </a:xfrm>
+          <a:prstGeom prst="rect">
+            <a:avLst/>
+          </a:prstGeom>
+          <a:noFill/>
+        </p:spPr>
+        <p:txBody>
+          <a:bodyPr wrap="square" tIns="0" bIns="0" lIns="0" rIns="0">
+            <a:spAutoFit/>
+          </a:bodyPr>
+          <a:lstStyle/>
+          <a:p>
+            <a:pPr algn="l">
+              <a:lnSpc>
+                <a:spcPct val="120000"/>
+              </a:lnSpc>
+              <a:defRPr sz="1500" b="0" i="0">
+                <a:solidFill>
+                  <a:srgbClr val="6D8470"/>
+                </a:solidFill>
+                <a:latin typeface="Arimo"/>
+              </a:defRPr>
+            </a:pPr>
+            <a:r>
+              <a:rPr sz="1500" b="0" i="0">
+                <a:solidFill>
+                  <a:srgbClr val="6D8470"/>
+                </a:solidFill>
+                <a:latin typeface="Arimo"/>
+              </a:rPr>
+              <a:t>Резюме по клиническому применению ниацинамида</a:t>
+            </a:r>
+          </a:p>
+        </p:txBody>
+      </p:sp>
+      <p:sp>
+        <p:nvSpPr>
+          <p:cNvPr id="10" name="Rounded Rectangle 9"/>
+          <p:cNvSpPr/>
+          <p:nvPr/>
+        </p:nvSpPr>
+        <p:spPr>
+          <a:xfrm>
+            <a:off x="357187" y="1303734"/>
+            <a:ext cx="8430768" cy="2857500"/>
+          </a:xfrm>
+          <a:prstGeom prst="roundRect">
+            <a:avLst/>
+          </a:prstGeom>
+          <a:solidFill>
+            <a:srgbClr val="E6D2CA"/>
+          </a:solidFill>
+          <a:ln w="12700">
+            <a:solidFill>
+              <a:srgbClr val="D7E0CE"/>
+            </a:solidFill>
+          </a:ln>
+        </p:spPr>
+        <p:style>
+          <a:lnRef idx="1">
+            <a:schemeClr val="accent1"/>
+          </a:lnRef>
+          <a:fillRef idx="3">
+            <a:schemeClr val="accent1"/>
+          </a:fillRef>
+          <a:effectRef idx="2">
+            <a:schemeClr val="accent1"/>
+          </a:effectRef>
+          <a:fontRef idx="minor">
+            <a:schemeClr val="lt1"/>
+          </a:fontRef>
+        </p:style>
+        <p:txBody>
+          <a:bodyPr rtlCol="0" anchor="ctr"/>
+          <a:lstStyle/>
+          <a:p>
+            <a:pPr algn="ctr"/>
+          </a:p>
+        </p:txBody>
+      </p:sp>
+      <p:sp>
+        <p:nvSpPr>
+          <p:cNvPr id="11" name="TextBox 10"/>
+          <p:cNvSpPr txBox="1"/>
+          <p:nvPr/>
+        </p:nvSpPr>
+        <p:spPr>
+          <a:xfrm>
+            <a:off x="640080" y="1580554"/>
+            <a:ext cx="7863840" cy="2286000"/>
+          </a:xfrm>
+          <a:prstGeom prst="rect">
+            <a:avLst/>
+          </a:prstGeom>
+          <a:noFill/>
+        </p:spPr>
+        <p:txBody>
+          <a:bodyPr wrap="square" tIns="0" bIns="0" lIns="0" rIns="0">
+            <a:spAutoFit/>
+          </a:bodyPr>
+          <a:lstStyle/>
+          <a:p>
+            <a:pPr algn="l">
+              <a:lnSpc>
+                <a:spcPct val="120000"/>
+              </a:lnSpc>
               <a:defRPr sz="1500" b="0" i="0">
                 <a:solidFill>
                   <a:srgbClr val="3D4A40"/>
@@ -5682,6 +6672,30 @@
           </a:p>
         </p:txBody>
       </p:sp>
+      <p:pic>
+        <p:nvPicPr>
+          <p:cNvPr id="12" name="Picture 11" descr="badge_2C3440.png"/>
+          <p:cNvPicPr>
+            <a:picLocks noChangeAspect="1"/>
+          </p:cNvPicPr>
+          <p:nvPr/>
+        </p:nvPicPr>
+        <p:blipFill>
+          <a:blip r:embed="rId3"/>
+          <a:stretch>
+            <a:fillRect/>
+          </a:stretch>
+        </p:blipFill>
+        <p:spPr>
+          <a:xfrm>
+            <a:off x="3750468" y="1750218"/>
+            <a:ext cx="1643062" cy="1643062"/>
+          </a:xfrm>
+          <a:prstGeom prst="rect">
+            <a:avLst/>
+          </a:prstGeom>
+        </p:spPr>
+      </p:pic>
     </p:spTree>
   </p:cSld>
   <p:clrMapOvr>
